--- a/apresentacao.pptx
+++ b/apresentacao.pptx
@@ -8,6 +8,7 @@
     <p:sldId id="256" r:id="rId7"/>
     <p:sldId id="257" r:id="rId8"/>
     <p:sldId id="258" r:id="rId9"/>
+    <p:sldId id="259" r:id="rId10"/>
   </p:sldIdLst>
   <p:sldSz cx="12191695" cy="6858000" type="screen4x3"/>
   <p:notesSz cx="6858000" cy="9144000"/>
@@ -3083,14 +3084,6 @@
 <file path=ppt/slides/slide1.xml><?xml version="1.0" encoding="utf-8"?>
 <p:sld xmlns:a="http://schemas.openxmlformats.org/drawingml/2006/main" xmlns:p="http://schemas.openxmlformats.org/presentationml/2006/main" xmlns:r="http://schemas.openxmlformats.org/officeDocument/2006/relationships">
   <p:cSld>
-    <p:bg>
-      <p:bgPr>
-        <a:solidFill>
-          <a:srgbClr val="0D1B2A"/>
-        </a:solidFill>
-        <a:effectLst/>
-      </p:bgPr>
-    </p:bg>
     <p:spTree>
       <p:nvGrpSpPr>
         <p:cNvPr id="1" name=""/>
@@ -3107,13 +3100,13 @@
         <p:spPr>
           <a:xfrm>
             <a:off x="0" y="0"/>
-            <a:ext cx="109728" cy="6858000"/>
+            <a:ext cx="12191695" cy="6858000"/>
           </a:xfrm>
           <a:prstGeom prst="rect">
             <a:avLst/>
           </a:prstGeom>
           <a:solidFill>
-            <a:srgbClr val="1B7A8A"/>
+            <a:srgbClr val="0E1A24"/>
           </a:solidFill>
           <a:ln>
             <a:noFill/>
@@ -3143,153 +3136,7 @@
       </p:sp>
       <p:sp>
         <p:nvSpPr>
-          <p:cNvPr id="3" name="TextBox 2"/>
-          <p:cNvSpPr txBox="1"/>
-          <p:nvPr/>
-        </p:nvSpPr>
-        <p:spPr>
-          <a:xfrm>
-            <a:off x="914400" y="1097280"/>
-            <a:ext cx="10058400" cy="1097280"/>
-          </a:xfrm>
-          <a:prstGeom prst="rect">
-            <a:avLst/>
-          </a:prstGeom>
-          <a:noFill/>
-        </p:spPr>
-        <p:txBody>
-          <a:bodyPr wrap="square">
-            <a:spAutoFit/>
-          </a:bodyPr>
-          <a:lstStyle/>
-          <a:p>
-            <a:pPr algn="l">
-              <a:defRPr sz="4400" b="1">
-                <a:solidFill>
-                  <a:srgbClr val="FFFFFF"/>
-                </a:solidFill>
-                <a:latin typeface="Calibri Light"/>
-              </a:defRPr>
-            </a:pPr>
-            <a:r>
-              <a:t>Pré-processamento e</a:t>
-            </a:r>
-            <a:br/>
-            <a:r>
-              <a:t>Análise Preditiva</a:t>
-            </a:r>
-          </a:p>
-        </p:txBody>
-      </p:sp>
-      <p:sp>
-        <p:nvSpPr>
-          <p:cNvPr id="4" name="TextBox 3"/>
-          <p:cNvSpPr txBox="1"/>
-          <p:nvPr/>
-        </p:nvSpPr>
-        <p:spPr>
-          <a:xfrm>
-            <a:off x="914400" y="2743200"/>
-            <a:ext cx="10058400" cy="548640"/>
-          </a:xfrm>
-          <a:prstGeom prst="rect">
-            <a:avLst/>
-          </a:prstGeom>
-          <a:noFill/>
-        </p:spPr>
-        <p:txBody>
-          <a:bodyPr wrap="square">
-            <a:spAutoFit/>
-          </a:bodyPr>
-          <a:lstStyle/>
-          <a:p>
-            <a:pPr algn="l">
-              <a:defRPr sz="1800" b="0">
-                <a:solidFill>
-                  <a:srgbClr val="1B7A8A"/>
-                </a:solidFill>
-                <a:latin typeface="Calibri"/>
-              </a:defRPr>
-            </a:pPr>
-            <a:r>
-              <a:t>Breast Cancer Wisconsin (Original) — UCI Machine Learning Repository</a:t>
-            </a:r>
-          </a:p>
-        </p:txBody>
-      </p:sp>
-      <p:sp>
-        <p:nvSpPr>
-          <p:cNvPr id="5" name="TextBox 4"/>
-          <p:cNvSpPr txBox="1"/>
-          <p:nvPr/>
-        </p:nvSpPr>
-        <p:spPr>
-          <a:xfrm>
-            <a:off x="914400" y="3840480"/>
-            <a:ext cx="10058400" cy="1371600"/>
-          </a:xfrm>
-          <a:prstGeom prst="rect">
-            <a:avLst/>
-          </a:prstGeom>
-          <a:noFill/>
-        </p:spPr>
-        <p:txBody>
-          <a:bodyPr wrap="square">
-            <a:spAutoFit/>
-          </a:bodyPr>
-          <a:lstStyle/>
-          <a:p>
-            <a:pPr algn="l">
-              <a:defRPr sz="1600" b="0">
-                <a:solidFill>
-                  <a:srgbClr val="CCCCCC"/>
-                </a:solidFill>
-                <a:latin typeface="Calibri"/>
-              </a:defRPr>
-            </a:pPr>
-            <a:r>
-              <a:t>João Victor Borges Carvalho</a:t>
-            </a:r>
-            <a:br/>
-            <a:r>
-              <a:t>Disciplina: Inteligência Artificial</a:t>
-            </a:r>
-            <a:br/>
-            <a:r>
-              <a:t>Implementação from scratch — Python puro + math</a:t>
-            </a:r>
-          </a:p>
-        </p:txBody>
-      </p:sp>
-    </p:spTree>
-  </p:cSld>
-  <p:clrMapOvr>
-    <a:masterClrMapping/>
-  </p:clrMapOvr>
-</p:sld>
-</file>
-
-<file path=ppt/slides/slide2.xml><?xml version="1.0" encoding="utf-8"?>
-<p:sld xmlns:a="http://schemas.openxmlformats.org/drawingml/2006/main" xmlns:p="http://schemas.openxmlformats.org/presentationml/2006/main" xmlns:r="http://schemas.openxmlformats.org/officeDocument/2006/relationships">
-  <p:cSld>
-    <p:bg>
-      <p:bgPr>
-        <a:solidFill>
-          <a:srgbClr val="0D1B2A"/>
-        </a:solidFill>
-        <a:effectLst/>
-      </p:bgPr>
-    </p:bg>
-    <p:spTree>
-      <p:nvGrpSpPr>
-        <p:cNvPr id="1" name=""/>
-        <p:cNvGrpSpPr/>
-        <p:nvPr/>
-      </p:nvGrpSpPr>
-      <p:grpSpPr/>
-      <p:sp>
-        <p:nvSpPr>
-          <p:cNvPr id="2" name="Rectangle 1"/>
+          <p:cNvPr id="3" name="Rectangle 2"/>
           <p:cNvSpPr/>
           <p:nvPr/>
         </p:nvSpPr>
@@ -3332,14 +3179,14 @@
       </p:sp>
       <p:sp>
         <p:nvSpPr>
-          <p:cNvPr id="3" name="TextBox 2"/>
-          <p:cNvSpPr txBox="1"/>
-          <p:nvPr/>
-        </p:nvSpPr>
-        <p:spPr>
-          <a:xfrm>
-            <a:off x="731520" y="365760"/>
-            <a:ext cx="10058400" cy="640080"/>
+          <p:cNvPr id="4" name="TextBox 3"/>
+          <p:cNvSpPr txBox="1"/>
+          <p:nvPr/>
+        </p:nvSpPr>
+        <p:spPr>
+          <a:xfrm>
+            <a:off x="731520" y="1188720"/>
+            <a:ext cx="10058400" cy="1188720"/>
           </a:xfrm>
           <a:prstGeom prst="rect">
             <a:avLst/>
@@ -3353,7 +3200,7 @@
           <a:lstStyle/>
           <a:p>
             <a:pPr algn="l">
-              <a:defRPr sz="3600" b="1">
+              <a:defRPr sz="4200" b="1">
                 <a:solidFill>
                   <a:srgbClr val="FFFFFF"/>
                 </a:solidFill>
@@ -3361,441 +3208,25 @@
               </a:defRPr>
             </a:pPr>
             <a:r>
-              <a:t>Metodologia</a:t>
-            </a:r>
-          </a:p>
-        </p:txBody>
-      </p:sp>
-      <p:sp>
-        <p:nvSpPr>
-          <p:cNvPr id="4" name="TextBox 3"/>
-          <p:cNvSpPr txBox="1"/>
-          <p:nvPr/>
-        </p:nvSpPr>
-        <p:spPr>
-          <a:xfrm>
-            <a:off x="731520" y="1188720"/>
-            <a:ext cx="5029200" cy="365760"/>
-          </a:xfrm>
-          <a:prstGeom prst="rect">
-            <a:avLst/>
-          </a:prstGeom>
-          <a:noFill/>
-        </p:spPr>
-        <p:txBody>
-          <a:bodyPr wrap="square">
-            <a:spAutoFit/>
-          </a:bodyPr>
-          <a:lstStyle/>
-          <a:p>
-            <a:pPr algn="l">
-              <a:defRPr sz="1800" b="1">
-                <a:solidFill>
-                  <a:srgbClr val="1B7A8A"/>
-                </a:solidFill>
-                <a:latin typeface="Calibri"/>
-              </a:defRPr>
-            </a:pPr>
-            <a:r>
-              <a:t>Pipeline de Pré-processamento</a:t>
-            </a:r>
-          </a:p>
-        </p:txBody>
-      </p:sp>
-      <p:sp>
-        <p:nvSpPr>
-          <p:cNvPr id="5" name="TextBox 4"/>
-          <p:cNvSpPr txBox="1"/>
-          <p:nvPr/>
-        </p:nvSpPr>
-        <p:spPr>
-          <a:xfrm>
-            <a:off x="731520" y="1737360"/>
-            <a:ext cx="5029200" cy="3657600"/>
-          </a:xfrm>
-          <a:prstGeom prst="rect">
-            <a:avLst/>
-          </a:prstGeom>
-          <a:noFill/>
-        </p:spPr>
-        <p:txBody>
-          <a:bodyPr wrap="square">
-            <a:spAutoFit/>
-          </a:bodyPr>
-          <a:lstStyle/>
-          <a:p>
-            <a:pPr algn="l">
-              <a:defRPr sz="1300" b="0">
-                <a:solidFill>
-                  <a:srgbClr val="CCCCCC"/>
-                </a:solidFill>
-                <a:latin typeface="Calibri"/>
-              </a:defRPr>
-            </a:pPr>
-            <a:r>
-              <a:t>1. Identificação do target (Class → 0/1)</a:t>
-            </a:r>
-          </a:p>
-          <a:p>
-            <a:pPr>
-              <a:spcBef>
-                <a:spcPts val="200"/>
-              </a:spcBef>
-              <a:defRPr sz="1300" b="0">
-                <a:solidFill>
-                  <a:srgbClr val="CCCCCC"/>
-                </a:solidFill>
-                <a:latin typeface="Calibri"/>
-              </a:defRPr>
-            </a:pPr>
-            <a:r>
-              <a:t>2. Análise de tipos, escala e estatísticas</a:t>
-            </a:r>
-          </a:p>
-          <a:p>
-            <a:pPr>
-              <a:spcBef>
-                <a:spcPts val="200"/>
-              </a:spcBef>
-              <a:defRPr sz="1300" b="0">
-                <a:solidFill>
-                  <a:srgbClr val="CCCCCC"/>
-                </a:solidFill>
-                <a:latin typeface="Calibri"/>
-              </a:defRPr>
-            </a:pPr>
-            <a:r>
-              <a:t>3. Split estratificado 80/20 (seed=42)</a:t>
-            </a:r>
-          </a:p>
-          <a:p>
-            <a:pPr>
-              <a:spcBef>
-                <a:spcPts val="200"/>
-              </a:spcBef>
-              <a:defRPr sz="1300" b="0">
-                <a:solidFill>
-                  <a:srgbClr val="CCCCCC"/>
-                </a:solidFill>
-                <a:latin typeface="Calibri"/>
-              </a:defRPr>
-            </a:pPr>
-            <a:r>
-              <a:t>4. Limpeza: 184 duplicatas removidas</a:t>
-            </a:r>
-          </a:p>
-          <a:p>
-            <a:pPr>
-              <a:spcBef>
-                <a:spcPts val="200"/>
-              </a:spcBef>
-              <a:defRPr sz="1300" b="0">
-                <a:solidFill>
-                  <a:srgbClr val="CCCCCC"/>
-                </a:solidFill>
-                <a:latin typeface="Calibri"/>
-              </a:defRPr>
-            </a:pPr>
-            <a:r>
-              <a:t>5. Outliers mantidos (contexto médico)</a:t>
-            </a:r>
-          </a:p>
-          <a:p>
-            <a:pPr>
-              <a:spcBef>
-                <a:spcPts val="200"/>
-              </a:spcBef>
-              <a:defRPr sz="1300" b="0">
-                <a:solidFill>
-                  <a:srgbClr val="CCCCCC"/>
-                </a:solidFill>
-                <a:latin typeface="Calibri"/>
-              </a:defRPr>
-            </a:pPr>
-            <a:r>
-              <a:t>6. Normalização Min-Max [0, 1]</a:t>
-            </a:r>
-          </a:p>
-          <a:p>
-            <a:pPr>
-              <a:spcBef>
-                <a:spcPts val="200"/>
-              </a:spcBef>
-              <a:defRPr sz="1300" b="0">
-                <a:solidFill>
-                  <a:srgbClr val="CCCCCC"/>
-                </a:solidFill>
-                <a:latin typeface="Calibri"/>
-              </a:defRPr>
-            </a:pPr>
-            <a:r>
-              <a:t>7. Correlação de Pearson — 9/9 features mantidas</a:t>
-            </a:r>
-          </a:p>
-        </p:txBody>
-      </p:sp>
-      <p:sp>
-        <p:nvSpPr>
-          <p:cNvPr id="6" name="TextBox 5"/>
-          <p:cNvSpPr txBox="1"/>
-          <p:nvPr/>
-        </p:nvSpPr>
-        <p:spPr>
-          <a:xfrm>
-            <a:off x="6583680" y="1188720"/>
-            <a:ext cx="5029200" cy="365760"/>
-          </a:xfrm>
-          <a:prstGeom prst="rect">
-            <a:avLst/>
-          </a:prstGeom>
-          <a:noFill/>
-        </p:spPr>
-        <p:txBody>
-          <a:bodyPr wrap="square">
-            <a:spAutoFit/>
-          </a:bodyPr>
-          <a:lstStyle/>
-          <a:p>
-            <a:pPr algn="l">
-              <a:defRPr sz="1800" b="1">
-                <a:solidFill>
-                  <a:srgbClr val="1B7A8A"/>
-                </a:solidFill>
-                <a:latin typeface="Calibri"/>
-              </a:defRPr>
-            </a:pPr>
-            <a:r>
-              <a:t>Algoritmos (todos do zero)</a:t>
-            </a:r>
-          </a:p>
-        </p:txBody>
-      </p:sp>
-      <p:sp>
-        <p:nvSpPr>
-          <p:cNvPr id="7" name="TextBox 6"/>
-          <p:cNvSpPr txBox="1"/>
-          <p:nvPr/>
-        </p:nvSpPr>
-        <p:spPr>
-          <a:xfrm>
-            <a:off x="6583680" y="1828800"/>
-            <a:ext cx="5029200" cy="274320"/>
-          </a:xfrm>
-          <a:prstGeom prst="rect">
-            <a:avLst/>
-          </a:prstGeom>
-          <a:noFill/>
-        </p:spPr>
-        <p:txBody>
-          <a:bodyPr wrap="square">
-            <a:spAutoFit/>
-          </a:bodyPr>
-          <a:lstStyle/>
-          <a:p>
-            <a:pPr algn="l">
-              <a:defRPr sz="1500" b="1">
-                <a:solidFill>
-                  <a:srgbClr val="FFFFFF"/>
-                </a:solidFill>
-                <a:latin typeface="Calibri"/>
-              </a:defRPr>
-            </a:pPr>
-            <a:r>
-              <a:t>K-NN</a:t>
-            </a:r>
-          </a:p>
-        </p:txBody>
-      </p:sp>
-      <p:sp>
-        <p:nvSpPr>
-          <p:cNvPr id="8" name="TextBox 7"/>
-          <p:cNvSpPr txBox="1"/>
-          <p:nvPr/>
-        </p:nvSpPr>
-        <p:spPr>
-          <a:xfrm>
-            <a:off x="6583680" y="2148840"/>
-            <a:ext cx="5029200" cy="640080"/>
-          </a:xfrm>
-          <a:prstGeom prst="rect">
-            <a:avLst/>
-          </a:prstGeom>
-          <a:noFill/>
-        </p:spPr>
-        <p:txBody>
-          <a:bodyPr wrap="square">
-            <a:spAutoFit/>
-          </a:bodyPr>
-          <a:lstStyle/>
-          <a:p>
-            <a:pPr algn="l">
-              <a:defRPr sz="1200" b="0">
-                <a:solidFill>
-                  <a:srgbClr val="CCCCCC"/>
-                </a:solidFill>
-                <a:latin typeface="Calibri"/>
-              </a:defRPr>
-            </a:pPr>
-            <a:r>
-              <a:t>Distância euclidiana + votação majoritária (K=3, ímpar)</a:t>
-            </a:r>
-          </a:p>
-        </p:txBody>
-      </p:sp>
-      <p:sp>
-        <p:nvSpPr>
-          <p:cNvPr id="9" name="TextBox 8"/>
-          <p:cNvSpPr txBox="1"/>
-          <p:nvPr/>
-        </p:nvSpPr>
-        <p:spPr>
-          <a:xfrm>
-            <a:off x="6583680" y="3017520"/>
-            <a:ext cx="5029200" cy="274320"/>
-          </a:xfrm>
-          <a:prstGeom prst="rect">
-            <a:avLst/>
-          </a:prstGeom>
-          <a:noFill/>
-        </p:spPr>
-        <p:txBody>
-          <a:bodyPr wrap="square">
-            <a:spAutoFit/>
-          </a:bodyPr>
-          <a:lstStyle/>
-          <a:p>
-            <a:pPr algn="l">
-              <a:defRPr sz="1500" b="1">
-                <a:solidFill>
-                  <a:srgbClr val="FFFFFF"/>
-                </a:solidFill>
-                <a:latin typeface="Calibri"/>
-              </a:defRPr>
-            </a:pPr>
-            <a:r>
-              <a:t>Árvore C4.5</a:t>
-            </a:r>
-          </a:p>
-        </p:txBody>
-      </p:sp>
-      <p:sp>
-        <p:nvSpPr>
-          <p:cNvPr id="10" name="TextBox 9"/>
-          <p:cNvSpPr txBox="1"/>
-          <p:nvPr/>
-        </p:nvSpPr>
-        <p:spPr>
-          <a:xfrm>
-            <a:off x="6583680" y="3337560"/>
-            <a:ext cx="5029200" cy="640080"/>
-          </a:xfrm>
-          <a:prstGeom prst="rect">
-            <a:avLst/>
-          </a:prstGeom>
-          <a:noFill/>
-        </p:spPr>
-        <p:txBody>
-          <a:bodyPr wrap="square">
-            <a:spAutoFit/>
-          </a:bodyPr>
-          <a:lstStyle/>
-          <a:p>
-            <a:pPr algn="l">
-              <a:defRPr sz="1200" b="0">
-                <a:solidFill>
-                  <a:srgbClr val="CCCCCC"/>
-                </a:solidFill>
-                <a:latin typeface="Calibri"/>
-              </a:defRPr>
-            </a:pPr>
-            <a:r>
-              <a:t>Gain Ratio + poda por profundidade (d=3, 15 nós)</a:t>
-            </a:r>
-          </a:p>
-        </p:txBody>
-      </p:sp>
-      <p:sp>
-        <p:nvSpPr>
-          <p:cNvPr id="11" name="TextBox 10"/>
-          <p:cNvSpPr txBox="1"/>
-          <p:nvPr/>
-        </p:nvSpPr>
-        <p:spPr>
-          <a:xfrm>
-            <a:off x="6583680" y="4206240"/>
-            <a:ext cx="5029200" cy="274320"/>
-          </a:xfrm>
-          <a:prstGeom prst="rect">
-            <a:avLst/>
-          </a:prstGeom>
-          <a:noFill/>
-        </p:spPr>
-        <p:txBody>
-          <a:bodyPr wrap="square">
-            <a:spAutoFit/>
-          </a:bodyPr>
-          <a:lstStyle/>
-          <a:p>
-            <a:pPr algn="l">
-              <a:defRPr sz="1500" b="1">
-                <a:solidFill>
-                  <a:srgbClr val="FFFFFF"/>
-                </a:solidFill>
-                <a:latin typeface="Calibri"/>
-              </a:defRPr>
-            </a:pPr>
-            <a:r>
-              <a:t>MLP (Rede Neural)</a:t>
-            </a:r>
-          </a:p>
-        </p:txBody>
-      </p:sp>
-      <p:sp>
-        <p:nvSpPr>
-          <p:cNvPr id="12" name="TextBox 11"/>
-          <p:cNvSpPr txBox="1"/>
-          <p:nvPr/>
-        </p:nvSpPr>
-        <p:spPr>
-          <a:xfrm>
-            <a:off x="6583680" y="4526279"/>
-            <a:ext cx="5029200" cy="640080"/>
-          </a:xfrm>
-          <a:prstGeom prst="rect">
-            <a:avLst/>
-          </a:prstGeom>
-          <a:noFill/>
-        </p:spPr>
-        <p:txBody>
-          <a:bodyPr wrap="square">
-            <a:spAutoFit/>
-          </a:bodyPr>
-          <a:lstStyle/>
-          <a:p>
-            <a:pPr algn="l">
-              <a:defRPr sz="1200" b="0">
-                <a:solidFill>
-                  <a:srgbClr val="CCCCCC"/>
-                </a:solidFill>
-                <a:latin typeface="Calibri"/>
-              </a:defRPr>
-            </a:pPr>
-            <a:r>
-              <a:t>Forward + Backpropagation + SGD manuais (9→8→1, 500 épocas)</a:t>
-            </a:r>
-          </a:p>
-        </p:txBody>
-      </p:sp>
-      <p:sp>
-        <p:nvSpPr>
-          <p:cNvPr id="13" name="Rectangle 12"/>
+              <a:t>Pre-processamento e</a:t>
+            </a:r>
+            <a:br/>
+            <a:r>
+              <a:t>Analise Preditiva</a:t>
+            </a:r>
+          </a:p>
+        </p:txBody>
+      </p:sp>
+      <p:sp>
+        <p:nvSpPr>
+          <p:cNvPr id="5" name="Rectangle 4"/>
           <p:cNvSpPr/>
           <p:nvPr/>
         </p:nvSpPr>
         <p:spPr>
           <a:xfrm>
-            <a:off x="731520" y="6217920"/>
-            <a:ext cx="10698480" cy="27432"/>
+            <a:off x="731520" y="2468880"/>
+            <a:ext cx="2286000" cy="45720"/>
           </a:xfrm>
           <a:prstGeom prst="rect">
             <a:avLst/>
@@ -3831,82 +3262,96 @@
       </p:sp>
       <p:sp>
         <p:nvSpPr>
-          <p:cNvPr id="14" name="TextBox 13"/>
-          <p:cNvSpPr txBox="1"/>
-          <p:nvPr/>
-        </p:nvSpPr>
-        <p:spPr>
-          <a:xfrm>
-            <a:off x="731520" y="6309360"/>
-            <a:ext cx="10698480" cy="457200"/>
-          </a:xfrm>
-          <a:prstGeom prst="rect">
-            <a:avLst/>
-          </a:prstGeom>
-          <a:noFill/>
-        </p:spPr>
-        <p:txBody>
-          <a:bodyPr wrap="square">
-            <a:spAutoFit/>
-          </a:bodyPr>
-          <a:lstStyle/>
-          <a:p>
-            <a:pPr algn="ctr">
-              <a:defRPr sz="1100" b="0">
-                <a:solidFill>
-                  <a:srgbClr val="8899AA"/>
-                </a:solidFill>
-                <a:latin typeface="Calibri"/>
-              </a:defRPr>
-            </a:pPr>
-            <a:r>
-              <a:t>362 exemplos de treino  •  137 de teste  •  9 features  •  ~2.400 linhas de código  •  Zero bibliotecas externas</a:t>
-            </a:r>
-          </a:p>
-        </p:txBody>
-      </p:sp>
-    </p:spTree>
-  </p:cSld>
-  <p:clrMapOvr>
-    <a:masterClrMapping/>
-  </p:clrMapOvr>
-</p:sld>
-</file>
-
-<file path=ppt/slides/slide3.xml><?xml version="1.0" encoding="utf-8"?>
-<p:sld xmlns:a="http://schemas.openxmlformats.org/drawingml/2006/main" xmlns:p="http://schemas.openxmlformats.org/presentationml/2006/main" xmlns:r="http://schemas.openxmlformats.org/officeDocument/2006/relationships">
-  <p:cSld>
-    <p:bg>
-      <p:bgPr>
-        <a:solidFill>
-          <a:srgbClr val="0D1B2A"/>
-        </a:solidFill>
-        <a:effectLst/>
-      </p:bgPr>
-    </p:bg>
-    <p:spTree>
-      <p:nvGrpSpPr>
-        <p:cNvPr id="1" name=""/>
-        <p:cNvGrpSpPr/>
-        <p:nvPr/>
-      </p:nvGrpSpPr>
-      <p:grpSpPr/>
-      <p:sp>
-        <p:nvSpPr>
-          <p:cNvPr id="2" name="Rectangle 1"/>
+          <p:cNvPr id="6" name="TextBox 5"/>
+          <p:cNvSpPr txBox="1"/>
+          <p:nvPr/>
+        </p:nvSpPr>
+        <p:spPr>
+          <a:xfrm>
+            <a:off x="731520" y="2697480"/>
+            <a:ext cx="10058400" cy="411480"/>
+          </a:xfrm>
+          <a:prstGeom prst="rect">
+            <a:avLst/>
+          </a:prstGeom>
+          <a:noFill/>
+        </p:spPr>
+        <p:txBody>
+          <a:bodyPr wrap="square">
+            <a:spAutoFit/>
+          </a:bodyPr>
+          <a:lstStyle/>
+          <a:p>
+            <a:pPr algn="l">
+              <a:defRPr sz="1700" b="0">
+                <a:solidFill>
+                  <a:srgbClr val="DDDDDD"/>
+                </a:solidFill>
+                <a:latin typeface="Calibri"/>
+              </a:defRPr>
+            </a:pPr>
+            <a:r>
+              <a:t>Breast Cancer Wisconsin (Original) — UCI ML Repository (id=15)</a:t>
+            </a:r>
+          </a:p>
+        </p:txBody>
+      </p:sp>
+      <p:sp>
+        <p:nvSpPr>
+          <p:cNvPr id="7" name="TextBox 6"/>
+          <p:cNvSpPr txBox="1"/>
+          <p:nvPr/>
+        </p:nvSpPr>
+        <p:spPr>
+          <a:xfrm>
+            <a:off x="731520" y="3246120"/>
+            <a:ext cx="10058400" cy="731520"/>
+          </a:xfrm>
+          <a:prstGeom prst="rect">
+            <a:avLst/>
+          </a:prstGeom>
+          <a:noFill/>
+        </p:spPr>
+        <p:txBody>
+          <a:bodyPr wrap="square">
+            <a:spAutoFit/>
+          </a:bodyPr>
+          <a:lstStyle/>
+          <a:p>
+            <a:pPr algn="l">
+              <a:defRPr sz="1300" b="0">
+                <a:solidFill>
+                  <a:srgbClr val="999999"/>
+                </a:solidFill>
+                <a:latin typeface="Calibri"/>
+              </a:defRPr>
+            </a:pPr>
+            <a:r>
+              <a:t>Joao Victor Borges Carvalho  |  Inteligencia Artificial</a:t>
+            </a:r>
+            <a:br/>
+            <a:r>
+              <a:t>Implementacao from scratch — Python puro + math</a:t>
+            </a:r>
+          </a:p>
+        </p:txBody>
+      </p:sp>
+      <p:sp>
+        <p:nvSpPr>
+          <p:cNvPr id="8" name="Rectangle 7"/>
           <p:cNvSpPr/>
           <p:nvPr/>
         </p:nvSpPr>
         <p:spPr>
           <a:xfrm>
-            <a:off x="0" y="0"/>
-            <a:ext cx="109728" cy="6858000"/>
+            <a:off x="731520" y="4846320"/>
+            <a:ext cx="2560320" cy="1188720"/>
           </a:xfrm>
           <a:prstGeom prst="rect">
             <a:avLst/>
           </a:prstGeom>
           <a:solidFill>
-            <a:srgbClr val="1B7A8A"/>
+            <a:srgbClr val="152A3A"/>
           </a:solidFill>
           <a:ln>
             <a:noFill/>
@@ -3936,252 +3381,36 @@
       </p:sp>
       <p:sp>
         <p:nvSpPr>
-          <p:cNvPr id="3" name="TextBox 2"/>
-          <p:cNvSpPr txBox="1"/>
-          <p:nvPr/>
-        </p:nvSpPr>
-        <p:spPr>
-          <a:xfrm>
-            <a:off x="731520" y="365760"/>
-            <a:ext cx="10058400" cy="640080"/>
-          </a:xfrm>
-          <a:prstGeom prst="rect">
-            <a:avLst/>
-          </a:prstGeom>
-          <a:noFill/>
-        </p:spPr>
-        <p:txBody>
-          <a:bodyPr wrap="square">
-            <a:spAutoFit/>
-          </a:bodyPr>
-          <a:lstStyle/>
-          <a:p>
-            <a:pPr algn="l">
-              <a:defRPr sz="3600" b="1">
+          <p:cNvPr id="9" name="TextBox 8"/>
+          <p:cNvSpPr txBox="1"/>
+          <p:nvPr/>
+        </p:nvSpPr>
+        <p:spPr>
+          <a:xfrm>
+            <a:off x="777240" y="4983480"/>
+            <a:ext cx="2468880" cy="594360"/>
+          </a:xfrm>
+          <a:prstGeom prst="rect">
+            <a:avLst/>
+          </a:prstGeom>
+          <a:noFill/>
+        </p:spPr>
+        <p:txBody>
+          <a:bodyPr wrap="square">
+            <a:spAutoFit/>
+          </a:bodyPr>
+          <a:lstStyle/>
+          <a:p>
+            <a:pPr algn="ctr">
+              <a:defRPr sz="3200" b="1">
                 <a:solidFill>
                   <a:srgbClr val="FFFFFF"/>
                 </a:solidFill>
-                <a:latin typeface="Calibri Light"/>
-              </a:defRPr>
-            </a:pPr>
-            <a:r>
-              <a:t>Resultados</a:t>
-            </a:r>
-          </a:p>
-        </p:txBody>
-      </p:sp>
-      <p:sp>
-        <p:nvSpPr>
-          <p:cNvPr id="4" name="TextBox 3"/>
-          <p:cNvSpPr txBox="1"/>
-          <p:nvPr/>
-        </p:nvSpPr>
-        <p:spPr>
-          <a:xfrm>
-            <a:off x="731520" y="1371600"/>
-            <a:ext cx="3657600" cy="411480"/>
-          </a:xfrm>
-          <a:prstGeom prst="rect">
-            <a:avLst/>
-          </a:prstGeom>
-          <a:noFill/>
-        </p:spPr>
-        <p:txBody>
-          <a:bodyPr wrap="square">
-            <a:spAutoFit/>
-          </a:bodyPr>
-          <a:lstStyle/>
-          <a:p>
-            <a:pPr algn="l">
-              <a:defRPr sz="1400" b="1">
-                <a:solidFill>
-                  <a:srgbClr val="1B7A8A"/>
-                </a:solidFill>
-                <a:latin typeface="Calibri"/>
-              </a:defRPr>
-            </a:pPr>
-            <a:r>
-              <a:t>Modelo</a:t>
-            </a:r>
-          </a:p>
-        </p:txBody>
-      </p:sp>
-      <p:sp>
-        <p:nvSpPr>
-          <p:cNvPr id="5" name="TextBox 4"/>
-          <p:cNvSpPr txBox="1"/>
-          <p:nvPr/>
-        </p:nvSpPr>
-        <p:spPr>
-          <a:xfrm>
-            <a:off x="4389120" y="1371600"/>
-            <a:ext cx="1463040" cy="411480"/>
-          </a:xfrm>
-          <a:prstGeom prst="rect">
-            <a:avLst/>
-          </a:prstGeom>
-          <a:noFill/>
-        </p:spPr>
-        <p:txBody>
-          <a:bodyPr wrap="square">
-            <a:spAutoFit/>
-          </a:bodyPr>
-          <a:lstStyle/>
-          <a:p>
-            <a:pPr algn="l">
-              <a:defRPr sz="1400" b="1">
-                <a:solidFill>
-                  <a:srgbClr val="1B7A8A"/>
-                </a:solidFill>
-                <a:latin typeface="Calibri"/>
-              </a:defRPr>
-            </a:pPr>
-            <a:r>
-              <a:t>Acurácia</a:t>
-            </a:r>
-          </a:p>
-        </p:txBody>
-      </p:sp>
-      <p:sp>
-        <p:nvSpPr>
-          <p:cNvPr id="6" name="TextBox 5"/>
-          <p:cNvSpPr txBox="1"/>
-          <p:nvPr/>
-        </p:nvSpPr>
-        <p:spPr>
-          <a:xfrm>
-            <a:off x="5852160" y="1371600"/>
-            <a:ext cx="1463040" cy="411480"/>
-          </a:xfrm>
-          <a:prstGeom prst="rect">
-            <a:avLst/>
-          </a:prstGeom>
-          <a:noFill/>
-        </p:spPr>
-        <p:txBody>
-          <a:bodyPr wrap="square">
-            <a:spAutoFit/>
-          </a:bodyPr>
-          <a:lstStyle/>
-          <a:p>
-            <a:pPr algn="l">
-              <a:defRPr sz="1400" b="1">
-                <a:solidFill>
-                  <a:srgbClr val="1B7A8A"/>
-                </a:solidFill>
-                <a:latin typeface="Calibri"/>
-              </a:defRPr>
-            </a:pPr>
-            <a:r>
-              <a:t>Precisão</a:t>
-            </a:r>
-          </a:p>
-        </p:txBody>
-      </p:sp>
-      <p:sp>
-        <p:nvSpPr>
-          <p:cNvPr id="7" name="TextBox 6"/>
-          <p:cNvSpPr txBox="1"/>
-          <p:nvPr/>
-        </p:nvSpPr>
-        <p:spPr>
-          <a:xfrm>
-            <a:off x="7315200" y="1371600"/>
-            <a:ext cx="1463040" cy="411480"/>
-          </a:xfrm>
-          <a:prstGeom prst="rect">
-            <a:avLst/>
-          </a:prstGeom>
-          <a:noFill/>
-        </p:spPr>
-        <p:txBody>
-          <a:bodyPr wrap="square">
-            <a:spAutoFit/>
-          </a:bodyPr>
-          <a:lstStyle/>
-          <a:p>
-            <a:pPr algn="l">
-              <a:defRPr sz="1400" b="1">
-                <a:solidFill>
-                  <a:srgbClr val="1B7A8A"/>
-                </a:solidFill>
-                <a:latin typeface="Calibri"/>
-              </a:defRPr>
-            </a:pPr>
-            <a:r>
-              <a:t>Recall</a:t>
-            </a:r>
-          </a:p>
-        </p:txBody>
-      </p:sp>
-      <p:sp>
-        <p:nvSpPr>
-          <p:cNvPr id="8" name="TextBox 7"/>
-          <p:cNvSpPr txBox="1"/>
-          <p:nvPr/>
-        </p:nvSpPr>
-        <p:spPr>
-          <a:xfrm>
-            <a:off x="8778240" y="1371600"/>
-            <a:ext cx="1463040" cy="411480"/>
-          </a:xfrm>
-          <a:prstGeom prst="rect">
-            <a:avLst/>
-          </a:prstGeom>
-          <a:noFill/>
-        </p:spPr>
-        <p:txBody>
-          <a:bodyPr wrap="square">
-            <a:spAutoFit/>
-          </a:bodyPr>
-          <a:lstStyle/>
-          <a:p>
-            <a:pPr algn="l">
-              <a:defRPr sz="1400" b="1">
-                <a:solidFill>
-                  <a:srgbClr val="1B7A8A"/>
-                </a:solidFill>
-                <a:latin typeface="Calibri"/>
-              </a:defRPr>
-            </a:pPr>
-            <a:r>
-              <a:t>F1-Score</a:t>
-            </a:r>
-          </a:p>
-        </p:txBody>
-      </p:sp>
-      <p:sp>
-        <p:nvSpPr>
-          <p:cNvPr id="9" name="TextBox 8"/>
-          <p:cNvSpPr txBox="1"/>
-          <p:nvPr/>
-        </p:nvSpPr>
-        <p:spPr>
-          <a:xfrm>
-            <a:off x="731520" y="1783080"/>
-            <a:ext cx="3657600" cy="411480"/>
-          </a:xfrm>
-          <a:prstGeom prst="rect">
-            <a:avLst/>
-          </a:prstGeom>
-          <a:noFill/>
-        </p:spPr>
-        <p:txBody>
-          <a:bodyPr wrap="square">
-            <a:spAutoFit/>
-          </a:bodyPr>
-          <a:lstStyle/>
-          <a:p>
-            <a:pPr algn="l">
-              <a:defRPr sz="1300" b="0">
-                <a:solidFill>
-                  <a:srgbClr val="CCCCCC"/>
-                </a:solidFill>
-                <a:latin typeface="Calibri"/>
-              </a:defRPr>
-            </a:pPr>
-            <a:r>
-              <a:t>Baseline</a:t>
+                <a:latin typeface="Calibri"/>
+              </a:defRPr>
+            </a:pPr>
+            <a:r>
+              <a:t>699</a:t>
             </a:r>
           </a:p>
         </p:txBody>
@@ -4194,152 +3423,44 @@
         </p:nvSpPr>
         <p:spPr>
           <a:xfrm>
-            <a:off x="4389120" y="1783080"/>
-            <a:ext cx="1463040" cy="411480"/>
-          </a:xfrm>
-          <a:prstGeom prst="rect">
-            <a:avLst/>
-          </a:prstGeom>
-          <a:noFill/>
-        </p:spPr>
-        <p:txBody>
-          <a:bodyPr wrap="square">
-            <a:spAutoFit/>
-          </a:bodyPr>
-          <a:lstStyle/>
-          <a:p>
-            <a:pPr algn="l">
-              <a:defRPr sz="1300" b="0">
-                <a:solidFill>
-                  <a:srgbClr val="CCCCCC"/>
-                </a:solidFill>
-                <a:latin typeface="Calibri"/>
-              </a:defRPr>
-            </a:pPr>
-            <a:r>
-              <a:t>0.3504</a:t>
-            </a:r>
-          </a:p>
-        </p:txBody>
-      </p:sp>
-      <p:sp>
-        <p:nvSpPr>
-          <p:cNvPr id="11" name="TextBox 10"/>
-          <p:cNvSpPr txBox="1"/>
-          <p:nvPr/>
-        </p:nvSpPr>
-        <p:spPr>
-          <a:xfrm>
-            <a:off x="5852160" y="1783080"/>
-            <a:ext cx="1463040" cy="411480"/>
-          </a:xfrm>
-          <a:prstGeom prst="rect">
-            <a:avLst/>
-          </a:prstGeom>
-          <a:noFill/>
-        </p:spPr>
-        <p:txBody>
-          <a:bodyPr wrap="square">
-            <a:spAutoFit/>
-          </a:bodyPr>
-          <a:lstStyle/>
-          <a:p>
-            <a:pPr algn="l">
-              <a:defRPr sz="1300" b="0">
-                <a:solidFill>
-                  <a:srgbClr val="CCCCCC"/>
-                </a:solidFill>
-                <a:latin typeface="Calibri"/>
-              </a:defRPr>
-            </a:pPr>
-            <a:r>
-              <a:t>0.3504</a:t>
-            </a:r>
-          </a:p>
-        </p:txBody>
-      </p:sp>
-      <p:sp>
-        <p:nvSpPr>
-          <p:cNvPr id="12" name="TextBox 11"/>
-          <p:cNvSpPr txBox="1"/>
-          <p:nvPr/>
-        </p:nvSpPr>
-        <p:spPr>
-          <a:xfrm>
-            <a:off x="7315200" y="1783080"/>
-            <a:ext cx="1463040" cy="411480"/>
-          </a:xfrm>
-          <a:prstGeom prst="rect">
-            <a:avLst/>
-          </a:prstGeom>
-          <a:noFill/>
-        </p:spPr>
-        <p:txBody>
-          <a:bodyPr wrap="square">
-            <a:spAutoFit/>
-          </a:bodyPr>
-          <a:lstStyle/>
-          <a:p>
-            <a:pPr algn="l">
-              <a:defRPr sz="1300" b="0">
-                <a:solidFill>
-                  <a:srgbClr val="CCCCCC"/>
-                </a:solidFill>
-                <a:latin typeface="Calibri"/>
-              </a:defRPr>
-            </a:pPr>
-            <a:r>
-              <a:t>1.0000</a:t>
-            </a:r>
-          </a:p>
-        </p:txBody>
-      </p:sp>
-      <p:sp>
-        <p:nvSpPr>
-          <p:cNvPr id="13" name="TextBox 12"/>
-          <p:cNvSpPr txBox="1"/>
-          <p:nvPr/>
-        </p:nvSpPr>
-        <p:spPr>
-          <a:xfrm>
-            <a:off x="8778240" y="1783080"/>
-            <a:ext cx="1463040" cy="411480"/>
-          </a:xfrm>
-          <a:prstGeom prst="rect">
-            <a:avLst/>
-          </a:prstGeom>
-          <a:noFill/>
-        </p:spPr>
-        <p:txBody>
-          <a:bodyPr wrap="square">
-            <a:spAutoFit/>
-          </a:bodyPr>
-          <a:lstStyle/>
-          <a:p>
-            <a:pPr algn="l">
-              <a:defRPr sz="1300" b="0">
-                <a:solidFill>
-                  <a:srgbClr val="CCCCCC"/>
-                </a:solidFill>
-                <a:latin typeface="Calibri"/>
-              </a:defRPr>
-            </a:pPr>
-            <a:r>
-              <a:t>0.5189</a:t>
-            </a:r>
-          </a:p>
-        </p:txBody>
-      </p:sp>
-      <p:sp>
-        <p:nvSpPr>
-          <p:cNvPr id="14" name="Rectangle 13"/>
+            <a:off x="777240" y="5532120"/>
+            <a:ext cx="2468880" cy="320040"/>
+          </a:xfrm>
+          <a:prstGeom prst="rect">
+            <a:avLst/>
+          </a:prstGeom>
+          <a:noFill/>
+        </p:spPr>
+        <p:txBody>
+          <a:bodyPr wrap="square">
+            <a:spAutoFit/>
+          </a:bodyPr>
+          <a:lstStyle/>
+          <a:p>
+            <a:pPr algn="ctr">
+              <a:defRPr sz="1100" b="0">
+                <a:solidFill>
+                  <a:srgbClr val="DDDDDD"/>
+                </a:solidFill>
+                <a:latin typeface="Calibri"/>
+              </a:defRPr>
+            </a:pPr>
+            <a:r>
+              <a:t>amostras</a:t>
+            </a:r>
+          </a:p>
+        </p:txBody>
+      </p:sp>
+      <p:sp>
+        <p:nvSpPr>
+          <p:cNvPr id="11" name="Rectangle 10"/>
           <p:cNvSpPr/>
           <p:nvPr/>
         </p:nvSpPr>
         <p:spPr>
           <a:xfrm>
-            <a:off x="731520" y="2176272"/>
-            <a:ext cx="9509760" cy="411480"/>
+            <a:off x="3429000" y="4846320"/>
+            <a:ext cx="2560320" cy="1188720"/>
           </a:xfrm>
           <a:prstGeom prst="rect">
             <a:avLst/>
@@ -4375,554 +3496,86 @@
       </p:sp>
       <p:sp>
         <p:nvSpPr>
-          <p:cNvPr id="15" name="TextBox 14"/>
-          <p:cNvSpPr txBox="1"/>
-          <p:nvPr/>
-        </p:nvSpPr>
-        <p:spPr>
-          <a:xfrm>
-            <a:off x="731520" y="2194560"/>
-            <a:ext cx="3657600" cy="411480"/>
-          </a:xfrm>
-          <a:prstGeom prst="rect">
-            <a:avLst/>
-          </a:prstGeom>
-          <a:noFill/>
-        </p:spPr>
-        <p:txBody>
-          <a:bodyPr wrap="square">
-            <a:spAutoFit/>
-          </a:bodyPr>
-          <a:lstStyle/>
-          <a:p>
-            <a:pPr algn="l">
-              <a:defRPr sz="1400" b="1">
-                <a:solidFill>
-                  <a:srgbClr val="1B7A8A"/>
-                </a:solidFill>
-                <a:latin typeface="Calibri"/>
-              </a:defRPr>
-            </a:pPr>
-            <a:r>
-              <a:t>K-NN (K=3)</a:t>
-            </a:r>
-          </a:p>
-        </p:txBody>
-      </p:sp>
-      <p:sp>
-        <p:nvSpPr>
-          <p:cNvPr id="16" name="TextBox 15"/>
-          <p:cNvSpPr txBox="1"/>
-          <p:nvPr/>
-        </p:nvSpPr>
-        <p:spPr>
-          <a:xfrm>
-            <a:off x="4389120" y="2194560"/>
-            <a:ext cx="1463040" cy="411480"/>
-          </a:xfrm>
-          <a:prstGeom prst="rect">
-            <a:avLst/>
-          </a:prstGeom>
-          <a:noFill/>
-        </p:spPr>
-        <p:txBody>
-          <a:bodyPr wrap="square">
-            <a:spAutoFit/>
-          </a:bodyPr>
-          <a:lstStyle/>
-          <a:p>
-            <a:pPr algn="l">
-              <a:defRPr sz="1400" b="1">
-                <a:solidFill>
-                  <a:srgbClr val="1B7A8A"/>
-                </a:solidFill>
-                <a:latin typeface="Calibri"/>
-              </a:defRPr>
-            </a:pPr>
-            <a:r>
-              <a:t>0.9781</a:t>
-            </a:r>
-          </a:p>
-        </p:txBody>
-      </p:sp>
-      <p:sp>
-        <p:nvSpPr>
-          <p:cNvPr id="17" name="TextBox 16"/>
-          <p:cNvSpPr txBox="1"/>
-          <p:nvPr/>
-        </p:nvSpPr>
-        <p:spPr>
-          <a:xfrm>
-            <a:off x="5852160" y="2194560"/>
-            <a:ext cx="1463040" cy="411480"/>
-          </a:xfrm>
-          <a:prstGeom prst="rect">
-            <a:avLst/>
-          </a:prstGeom>
-          <a:noFill/>
-        </p:spPr>
-        <p:txBody>
-          <a:bodyPr wrap="square">
-            <a:spAutoFit/>
-          </a:bodyPr>
-          <a:lstStyle/>
-          <a:p>
-            <a:pPr algn="l">
-              <a:defRPr sz="1400" b="1">
-                <a:solidFill>
-                  <a:srgbClr val="1B7A8A"/>
-                </a:solidFill>
-                <a:latin typeface="Calibri"/>
-              </a:defRPr>
-            </a:pPr>
-            <a:r>
-              <a:t>1.0000</a:t>
-            </a:r>
-          </a:p>
-        </p:txBody>
-      </p:sp>
-      <p:sp>
-        <p:nvSpPr>
-          <p:cNvPr id="18" name="TextBox 17"/>
-          <p:cNvSpPr txBox="1"/>
-          <p:nvPr/>
-        </p:nvSpPr>
-        <p:spPr>
-          <a:xfrm>
-            <a:off x="7315200" y="2194560"/>
-            <a:ext cx="1463040" cy="411480"/>
-          </a:xfrm>
-          <a:prstGeom prst="rect">
-            <a:avLst/>
-          </a:prstGeom>
-          <a:noFill/>
-        </p:spPr>
-        <p:txBody>
-          <a:bodyPr wrap="square">
-            <a:spAutoFit/>
-          </a:bodyPr>
-          <a:lstStyle/>
-          <a:p>
-            <a:pPr algn="l">
-              <a:defRPr sz="1400" b="1">
-                <a:solidFill>
-                  <a:srgbClr val="1B7A8A"/>
-                </a:solidFill>
-                <a:latin typeface="Calibri"/>
-              </a:defRPr>
-            </a:pPr>
-            <a:r>
-              <a:t>0.9375</a:t>
-            </a:r>
-          </a:p>
-        </p:txBody>
-      </p:sp>
-      <p:sp>
-        <p:nvSpPr>
-          <p:cNvPr id="19" name="TextBox 18"/>
-          <p:cNvSpPr txBox="1"/>
-          <p:nvPr/>
-        </p:nvSpPr>
-        <p:spPr>
-          <a:xfrm>
-            <a:off x="8778240" y="2194560"/>
-            <a:ext cx="1463040" cy="411480"/>
-          </a:xfrm>
-          <a:prstGeom prst="rect">
-            <a:avLst/>
-          </a:prstGeom>
-          <a:noFill/>
-        </p:spPr>
-        <p:txBody>
-          <a:bodyPr wrap="square">
-            <a:spAutoFit/>
-          </a:bodyPr>
-          <a:lstStyle/>
-          <a:p>
-            <a:pPr algn="l">
-              <a:defRPr sz="1400" b="1">
-                <a:solidFill>
-                  <a:srgbClr val="1B7A8A"/>
-                </a:solidFill>
-                <a:latin typeface="Calibri"/>
-              </a:defRPr>
-            </a:pPr>
-            <a:r>
-              <a:t>0.9677</a:t>
-            </a:r>
-          </a:p>
-        </p:txBody>
-      </p:sp>
-      <p:sp>
-        <p:nvSpPr>
-          <p:cNvPr id="20" name="TextBox 19"/>
-          <p:cNvSpPr txBox="1"/>
-          <p:nvPr/>
-        </p:nvSpPr>
-        <p:spPr>
-          <a:xfrm>
-            <a:off x="731520" y="2606040"/>
-            <a:ext cx="3657600" cy="411480"/>
-          </a:xfrm>
-          <a:prstGeom prst="rect">
-            <a:avLst/>
-          </a:prstGeom>
-          <a:noFill/>
-        </p:spPr>
-        <p:txBody>
-          <a:bodyPr wrap="square">
-            <a:spAutoFit/>
-          </a:bodyPr>
-          <a:lstStyle/>
-          <a:p>
-            <a:pPr algn="l">
-              <a:defRPr sz="1300" b="0">
-                <a:solidFill>
-                  <a:srgbClr val="CCCCCC"/>
-                </a:solidFill>
-                <a:latin typeface="Calibri"/>
-              </a:defRPr>
-            </a:pPr>
-            <a:r>
-              <a:t>C4.5 (d=3)</a:t>
-            </a:r>
-          </a:p>
-        </p:txBody>
-      </p:sp>
-      <p:sp>
-        <p:nvSpPr>
-          <p:cNvPr id="21" name="TextBox 20"/>
-          <p:cNvSpPr txBox="1"/>
-          <p:nvPr/>
-        </p:nvSpPr>
-        <p:spPr>
-          <a:xfrm>
-            <a:off x="4389120" y="2606040"/>
-            <a:ext cx="1463040" cy="411480"/>
-          </a:xfrm>
-          <a:prstGeom prst="rect">
-            <a:avLst/>
-          </a:prstGeom>
-          <a:noFill/>
-        </p:spPr>
-        <p:txBody>
-          <a:bodyPr wrap="square">
-            <a:spAutoFit/>
-          </a:bodyPr>
-          <a:lstStyle/>
-          <a:p>
-            <a:pPr algn="l">
-              <a:defRPr sz="1300" b="0">
-                <a:solidFill>
-                  <a:srgbClr val="CCCCCC"/>
-                </a:solidFill>
-                <a:latin typeface="Calibri"/>
-              </a:defRPr>
-            </a:pPr>
-            <a:r>
-              <a:t>0.9708</a:t>
-            </a:r>
-          </a:p>
-        </p:txBody>
-      </p:sp>
-      <p:sp>
-        <p:nvSpPr>
-          <p:cNvPr id="22" name="TextBox 21"/>
-          <p:cNvSpPr txBox="1"/>
-          <p:nvPr/>
-        </p:nvSpPr>
-        <p:spPr>
-          <a:xfrm>
-            <a:off x="5852160" y="2606040"/>
-            <a:ext cx="1463040" cy="411480"/>
-          </a:xfrm>
-          <a:prstGeom prst="rect">
-            <a:avLst/>
-          </a:prstGeom>
-          <a:noFill/>
-        </p:spPr>
-        <p:txBody>
-          <a:bodyPr wrap="square">
-            <a:spAutoFit/>
-          </a:bodyPr>
-          <a:lstStyle/>
-          <a:p>
-            <a:pPr algn="l">
-              <a:defRPr sz="1300" b="0">
-                <a:solidFill>
-                  <a:srgbClr val="CCCCCC"/>
-                </a:solidFill>
-                <a:latin typeface="Calibri"/>
-              </a:defRPr>
-            </a:pPr>
-            <a:r>
-              <a:t>0.9783</a:t>
-            </a:r>
-          </a:p>
-        </p:txBody>
-      </p:sp>
-      <p:sp>
-        <p:nvSpPr>
-          <p:cNvPr id="23" name="TextBox 22"/>
-          <p:cNvSpPr txBox="1"/>
-          <p:nvPr/>
-        </p:nvSpPr>
-        <p:spPr>
-          <a:xfrm>
-            <a:off x="7315200" y="2606040"/>
-            <a:ext cx="1463040" cy="411480"/>
-          </a:xfrm>
-          <a:prstGeom prst="rect">
-            <a:avLst/>
-          </a:prstGeom>
-          <a:noFill/>
-        </p:spPr>
-        <p:txBody>
-          <a:bodyPr wrap="square">
-            <a:spAutoFit/>
-          </a:bodyPr>
-          <a:lstStyle/>
-          <a:p>
-            <a:pPr algn="l">
-              <a:defRPr sz="1300" b="0">
-                <a:solidFill>
-                  <a:srgbClr val="CCCCCC"/>
-                </a:solidFill>
-                <a:latin typeface="Calibri"/>
-              </a:defRPr>
-            </a:pPr>
-            <a:r>
-              <a:t>0.9375</a:t>
-            </a:r>
-          </a:p>
-        </p:txBody>
-      </p:sp>
-      <p:sp>
-        <p:nvSpPr>
-          <p:cNvPr id="24" name="TextBox 23"/>
-          <p:cNvSpPr txBox="1"/>
-          <p:nvPr/>
-        </p:nvSpPr>
-        <p:spPr>
-          <a:xfrm>
-            <a:off x="8778240" y="2606040"/>
-            <a:ext cx="1463040" cy="411480"/>
-          </a:xfrm>
-          <a:prstGeom prst="rect">
-            <a:avLst/>
-          </a:prstGeom>
-          <a:noFill/>
-        </p:spPr>
-        <p:txBody>
-          <a:bodyPr wrap="square">
-            <a:spAutoFit/>
-          </a:bodyPr>
-          <a:lstStyle/>
-          <a:p>
-            <a:pPr algn="l">
-              <a:defRPr sz="1300" b="0">
-                <a:solidFill>
-                  <a:srgbClr val="CCCCCC"/>
-                </a:solidFill>
-                <a:latin typeface="Calibri"/>
-              </a:defRPr>
-            </a:pPr>
-            <a:r>
-              <a:t>0.9574</a:t>
-            </a:r>
-          </a:p>
-        </p:txBody>
-      </p:sp>
-      <p:sp>
-        <p:nvSpPr>
-          <p:cNvPr id="25" name="TextBox 24"/>
-          <p:cNvSpPr txBox="1"/>
-          <p:nvPr/>
-        </p:nvSpPr>
-        <p:spPr>
-          <a:xfrm>
-            <a:off x="731520" y="3017520"/>
-            <a:ext cx="3657600" cy="411480"/>
-          </a:xfrm>
-          <a:prstGeom prst="rect">
-            <a:avLst/>
-          </a:prstGeom>
-          <a:noFill/>
-        </p:spPr>
-        <p:txBody>
-          <a:bodyPr wrap="square">
-            <a:spAutoFit/>
-          </a:bodyPr>
-          <a:lstStyle/>
-          <a:p>
-            <a:pPr algn="l">
-              <a:defRPr sz="1300" b="0">
-                <a:solidFill>
-                  <a:srgbClr val="CCCCCC"/>
-                </a:solidFill>
-                <a:latin typeface="Calibri"/>
-              </a:defRPr>
-            </a:pPr>
-            <a:r>
-              <a:t>MLP (8 ocultos)</a:t>
-            </a:r>
-          </a:p>
-        </p:txBody>
-      </p:sp>
-      <p:sp>
-        <p:nvSpPr>
-          <p:cNvPr id="26" name="TextBox 25"/>
-          <p:cNvSpPr txBox="1"/>
-          <p:nvPr/>
-        </p:nvSpPr>
-        <p:spPr>
-          <a:xfrm>
-            <a:off x="4389120" y="3017520"/>
-            <a:ext cx="1463040" cy="411480"/>
-          </a:xfrm>
-          <a:prstGeom prst="rect">
-            <a:avLst/>
-          </a:prstGeom>
-          <a:noFill/>
-        </p:spPr>
-        <p:txBody>
-          <a:bodyPr wrap="square">
-            <a:spAutoFit/>
-          </a:bodyPr>
-          <a:lstStyle/>
-          <a:p>
-            <a:pPr algn="l">
-              <a:defRPr sz="1300" b="0">
-                <a:solidFill>
-                  <a:srgbClr val="CCCCCC"/>
-                </a:solidFill>
-                <a:latin typeface="Calibri"/>
-              </a:defRPr>
-            </a:pPr>
-            <a:r>
-              <a:t>0.9635</a:t>
-            </a:r>
-          </a:p>
-        </p:txBody>
-      </p:sp>
-      <p:sp>
-        <p:nvSpPr>
-          <p:cNvPr id="27" name="TextBox 26"/>
-          <p:cNvSpPr txBox="1"/>
-          <p:nvPr/>
-        </p:nvSpPr>
-        <p:spPr>
-          <a:xfrm>
-            <a:off x="5852160" y="3017520"/>
-            <a:ext cx="1463040" cy="411480"/>
-          </a:xfrm>
-          <a:prstGeom prst="rect">
-            <a:avLst/>
-          </a:prstGeom>
-          <a:noFill/>
-        </p:spPr>
-        <p:txBody>
-          <a:bodyPr wrap="square">
-            <a:spAutoFit/>
-          </a:bodyPr>
-          <a:lstStyle/>
-          <a:p>
-            <a:pPr algn="l">
-              <a:defRPr sz="1300" b="0">
-                <a:solidFill>
-                  <a:srgbClr val="CCCCCC"/>
-                </a:solidFill>
-                <a:latin typeface="Calibri"/>
-              </a:defRPr>
-            </a:pPr>
-            <a:r>
-              <a:t>0.9778</a:t>
-            </a:r>
-          </a:p>
-        </p:txBody>
-      </p:sp>
-      <p:sp>
-        <p:nvSpPr>
-          <p:cNvPr id="28" name="TextBox 27"/>
-          <p:cNvSpPr txBox="1"/>
-          <p:nvPr/>
-        </p:nvSpPr>
-        <p:spPr>
-          <a:xfrm>
-            <a:off x="7315200" y="3017520"/>
-            <a:ext cx="1463040" cy="411480"/>
-          </a:xfrm>
-          <a:prstGeom prst="rect">
-            <a:avLst/>
-          </a:prstGeom>
-          <a:noFill/>
-        </p:spPr>
-        <p:txBody>
-          <a:bodyPr wrap="square">
-            <a:spAutoFit/>
-          </a:bodyPr>
-          <a:lstStyle/>
-          <a:p>
-            <a:pPr algn="l">
-              <a:defRPr sz="1300" b="0">
-                <a:solidFill>
-                  <a:srgbClr val="CCCCCC"/>
-                </a:solidFill>
-                <a:latin typeface="Calibri"/>
-              </a:defRPr>
-            </a:pPr>
-            <a:r>
-              <a:t>0.9167</a:t>
-            </a:r>
-          </a:p>
-        </p:txBody>
-      </p:sp>
-      <p:sp>
-        <p:nvSpPr>
-          <p:cNvPr id="29" name="TextBox 28"/>
-          <p:cNvSpPr txBox="1"/>
-          <p:nvPr/>
-        </p:nvSpPr>
-        <p:spPr>
-          <a:xfrm>
-            <a:off x="8778240" y="3017520"/>
-            <a:ext cx="1463040" cy="411480"/>
-          </a:xfrm>
-          <a:prstGeom prst="rect">
-            <a:avLst/>
-          </a:prstGeom>
-          <a:noFill/>
-        </p:spPr>
-        <p:txBody>
-          <a:bodyPr wrap="square">
-            <a:spAutoFit/>
-          </a:bodyPr>
-          <a:lstStyle/>
-          <a:p>
-            <a:pPr algn="l">
-              <a:defRPr sz="1300" b="0">
-                <a:solidFill>
-                  <a:srgbClr val="CCCCCC"/>
-                </a:solidFill>
-                <a:latin typeface="Calibri"/>
-              </a:defRPr>
-            </a:pPr>
-            <a:r>
-              <a:t>0.9462</a:t>
-            </a:r>
-          </a:p>
-        </p:txBody>
-      </p:sp>
-      <p:sp>
-        <p:nvSpPr>
-          <p:cNvPr id="30" name="Rectangle 29"/>
+          <p:cNvPr id="12" name="TextBox 11"/>
+          <p:cNvSpPr txBox="1"/>
+          <p:nvPr/>
+        </p:nvSpPr>
+        <p:spPr>
+          <a:xfrm>
+            <a:off x="3474720" y="4983480"/>
+            <a:ext cx="2468880" cy="594360"/>
+          </a:xfrm>
+          <a:prstGeom prst="rect">
+            <a:avLst/>
+          </a:prstGeom>
+          <a:noFill/>
+        </p:spPr>
+        <p:txBody>
+          <a:bodyPr wrap="square">
+            <a:spAutoFit/>
+          </a:bodyPr>
+          <a:lstStyle/>
+          <a:p>
+            <a:pPr algn="ctr">
+              <a:defRPr sz="3200" b="1">
+                <a:solidFill>
+                  <a:srgbClr val="FFFFFF"/>
+                </a:solidFill>
+                <a:latin typeface="Calibri"/>
+              </a:defRPr>
+            </a:pPr>
+            <a:r>
+              <a:t>683</a:t>
+            </a:r>
+          </a:p>
+        </p:txBody>
+      </p:sp>
+      <p:sp>
+        <p:nvSpPr>
+          <p:cNvPr id="13" name="TextBox 12"/>
+          <p:cNvSpPr txBox="1"/>
+          <p:nvPr/>
+        </p:nvSpPr>
+        <p:spPr>
+          <a:xfrm>
+            <a:off x="3474720" y="5532120"/>
+            <a:ext cx="2468880" cy="320040"/>
+          </a:xfrm>
+          <a:prstGeom prst="rect">
+            <a:avLst/>
+          </a:prstGeom>
+          <a:noFill/>
+        </p:spPr>
+        <p:txBody>
+          <a:bodyPr wrap="square">
+            <a:spAutoFit/>
+          </a:bodyPr>
+          <a:lstStyle/>
+          <a:p>
+            <a:pPr algn="ctr">
+              <a:defRPr sz="1100" b="0">
+                <a:solidFill>
+                  <a:srgbClr val="DDDDDD"/>
+                </a:solidFill>
+                <a:latin typeface="Calibri"/>
+              </a:defRPr>
+            </a:pPr>
+            <a:r>
+              <a:t>exemplos validos</a:t>
+            </a:r>
+          </a:p>
+        </p:txBody>
+      </p:sp>
+      <p:sp>
+        <p:nvSpPr>
+          <p:cNvPr id="14" name="Rectangle 13"/>
           <p:cNvSpPr/>
           <p:nvPr/>
         </p:nvSpPr>
         <p:spPr>
           <a:xfrm>
-            <a:off x="731520" y="3840480"/>
-            <a:ext cx="3474720" cy="2011680"/>
+            <a:off x="6126480" y="4846320"/>
+            <a:ext cx="2560320" cy="1188720"/>
           </a:xfrm>
           <a:prstGeom prst="rect">
             <a:avLst/>
@@ -4958,86 +3611,86 @@
       </p:sp>
       <p:sp>
         <p:nvSpPr>
-          <p:cNvPr id="31" name="TextBox 30"/>
-          <p:cNvSpPr txBox="1"/>
-          <p:nvPr/>
-        </p:nvSpPr>
-        <p:spPr>
-          <a:xfrm>
-            <a:off x="914400" y="4023360"/>
-            <a:ext cx="3108960" cy="365760"/>
-          </a:xfrm>
-          <a:prstGeom prst="rect">
-            <a:avLst/>
-          </a:prstGeom>
-          <a:noFill/>
-        </p:spPr>
-        <p:txBody>
-          <a:bodyPr wrap="square">
-            <a:spAutoFit/>
-          </a:bodyPr>
-          <a:lstStyle/>
-          <a:p>
-            <a:pPr algn="l">
-              <a:defRPr sz="1600" b="1">
-                <a:solidFill>
-                  <a:srgbClr val="1B7A8A"/>
-                </a:solidFill>
-                <a:latin typeface="Calibri"/>
-              </a:defRPr>
-            </a:pPr>
-            <a:r>
-              <a:t>Precisão perfeita</a:t>
-            </a:r>
-          </a:p>
-        </p:txBody>
-      </p:sp>
-      <p:sp>
-        <p:nvSpPr>
-          <p:cNvPr id="32" name="TextBox 31"/>
-          <p:cNvSpPr txBox="1"/>
-          <p:nvPr/>
-        </p:nvSpPr>
-        <p:spPr>
-          <a:xfrm>
-            <a:off x="914400" y="4480560"/>
-            <a:ext cx="3108960" cy="1097280"/>
-          </a:xfrm>
-          <a:prstGeom prst="rect">
-            <a:avLst/>
-          </a:prstGeom>
-          <a:noFill/>
-        </p:spPr>
-        <p:txBody>
-          <a:bodyPr wrap="square">
-            <a:spAutoFit/>
-          </a:bodyPr>
-          <a:lstStyle/>
-          <a:p>
-            <a:pPr algn="l">
+          <p:cNvPr id="15" name="TextBox 14"/>
+          <p:cNvSpPr txBox="1"/>
+          <p:nvPr/>
+        </p:nvSpPr>
+        <p:spPr>
+          <a:xfrm>
+            <a:off x="6172200" y="4983480"/>
+            <a:ext cx="2468880" cy="594360"/>
+          </a:xfrm>
+          <a:prstGeom prst="rect">
+            <a:avLst/>
+          </a:prstGeom>
+          <a:noFill/>
+        </p:spPr>
+        <p:txBody>
+          <a:bodyPr wrap="square">
+            <a:spAutoFit/>
+          </a:bodyPr>
+          <a:lstStyle/>
+          <a:p>
+            <a:pPr algn="ctr">
+              <a:defRPr sz="3200" b="1">
+                <a:solidFill>
+                  <a:srgbClr val="FFFFFF"/>
+                </a:solidFill>
+                <a:latin typeface="Calibri"/>
+              </a:defRPr>
+            </a:pPr>
+            <a:r>
+              <a:t>9</a:t>
+            </a:r>
+          </a:p>
+        </p:txBody>
+      </p:sp>
+      <p:sp>
+        <p:nvSpPr>
+          <p:cNvPr id="16" name="TextBox 15"/>
+          <p:cNvSpPr txBox="1"/>
+          <p:nvPr/>
+        </p:nvSpPr>
+        <p:spPr>
+          <a:xfrm>
+            <a:off x="6172200" y="5532120"/>
+            <a:ext cx="2468880" cy="320040"/>
+          </a:xfrm>
+          <a:prstGeom prst="rect">
+            <a:avLst/>
+          </a:prstGeom>
+          <a:noFill/>
+        </p:spPr>
+        <p:txBody>
+          <a:bodyPr wrap="square">
+            <a:spAutoFit/>
+          </a:bodyPr>
+          <a:lstStyle/>
+          <a:p>
+            <a:pPr algn="ctr">
               <a:defRPr sz="1100" b="0">
                 <a:solidFill>
-                  <a:srgbClr val="CCCCCC"/>
-                </a:solidFill>
-                <a:latin typeface="Calibri"/>
-              </a:defRPr>
-            </a:pPr>
-            <a:r>
-              <a:t>K-NN não gerou nenhum falso positivo — zero pacientes saudáveis receberam diagnóstico equivocado de câncer.</a:t>
-            </a:r>
-          </a:p>
-        </p:txBody>
-      </p:sp>
-      <p:sp>
-        <p:nvSpPr>
-          <p:cNvPr id="33" name="Rectangle 32"/>
+                  <a:srgbClr val="DDDDDD"/>
+                </a:solidFill>
+                <a:latin typeface="Calibri"/>
+              </a:defRPr>
+            </a:pPr>
+            <a:r>
+              <a:t>caracteristicas</a:t>
+            </a:r>
+          </a:p>
+        </p:txBody>
+      </p:sp>
+      <p:sp>
+        <p:nvSpPr>
+          <p:cNvPr id="17" name="Rectangle 16"/>
           <p:cNvSpPr/>
           <p:nvPr/>
         </p:nvSpPr>
         <p:spPr>
           <a:xfrm>
-            <a:off x="4663440" y="3840480"/>
-            <a:ext cx="3474720" cy="2011680"/>
+            <a:off x="8823960" y="4846320"/>
+            <a:ext cx="2560320" cy="1188720"/>
           </a:xfrm>
           <a:prstGeom prst="rect">
             <a:avLst/>
@@ -5073,92 +3726,110 @@
       </p:sp>
       <p:sp>
         <p:nvSpPr>
-          <p:cNvPr id="34" name="TextBox 33"/>
-          <p:cNvSpPr txBox="1"/>
-          <p:nvPr/>
-        </p:nvSpPr>
-        <p:spPr>
-          <a:xfrm>
-            <a:off x="4846320" y="4023360"/>
-            <a:ext cx="3108960" cy="365760"/>
-          </a:xfrm>
-          <a:prstGeom prst="rect">
-            <a:avLst/>
-          </a:prstGeom>
-          <a:noFill/>
-        </p:spPr>
-        <p:txBody>
-          <a:bodyPr wrap="square">
-            <a:spAutoFit/>
-          </a:bodyPr>
-          <a:lstStyle/>
-          <a:p>
-            <a:pPr algn="l">
-              <a:defRPr sz="1600" b="1">
-                <a:solidFill>
-                  <a:srgbClr val="1B7A8A"/>
-                </a:solidFill>
-                <a:latin typeface="Calibri"/>
-              </a:defRPr>
-            </a:pPr>
-            <a:r>
-              <a:t>93.75% de recall</a:t>
-            </a:r>
-          </a:p>
-        </p:txBody>
-      </p:sp>
-      <p:sp>
-        <p:nvSpPr>
-          <p:cNvPr id="35" name="TextBox 34"/>
-          <p:cNvSpPr txBox="1"/>
-          <p:nvPr/>
-        </p:nvSpPr>
-        <p:spPr>
-          <a:xfrm>
-            <a:off x="4846320" y="4480560"/>
-            <a:ext cx="3108960" cy="1097280"/>
-          </a:xfrm>
-          <a:prstGeom prst="rect">
-            <a:avLst/>
-          </a:prstGeom>
-          <a:noFill/>
-        </p:spPr>
-        <p:txBody>
-          <a:bodyPr wrap="square">
-            <a:spAutoFit/>
-          </a:bodyPr>
-          <a:lstStyle/>
-          <a:p>
-            <a:pPr algn="l">
+          <p:cNvPr id="18" name="TextBox 17"/>
+          <p:cNvSpPr txBox="1"/>
+          <p:nvPr/>
+        </p:nvSpPr>
+        <p:spPr>
+          <a:xfrm>
+            <a:off x="8869680" y="4983480"/>
+            <a:ext cx="2468880" cy="594360"/>
+          </a:xfrm>
+          <a:prstGeom prst="rect">
+            <a:avLst/>
+          </a:prstGeom>
+          <a:noFill/>
+        </p:spPr>
+        <p:txBody>
+          <a:bodyPr wrap="square">
+            <a:spAutoFit/>
+          </a:bodyPr>
+          <a:lstStyle/>
+          <a:p>
+            <a:pPr algn="ctr">
+              <a:defRPr sz="3200" b="1">
+                <a:solidFill>
+                  <a:srgbClr val="FFFFFF"/>
+                </a:solidFill>
+                <a:latin typeface="Calibri"/>
+              </a:defRPr>
+            </a:pPr>
+            <a:r>
+              <a:t>1-10</a:t>
+            </a:r>
+          </a:p>
+        </p:txBody>
+      </p:sp>
+      <p:sp>
+        <p:nvSpPr>
+          <p:cNvPr id="19" name="TextBox 18"/>
+          <p:cNvSpPr txBox="1"/>
+          <p:nvPr/>
+        </p:nvSpPr>
+        <p:spPr>
+          <a:xfrm>
+            <a:off x="8869680" y="5532120"/>
+            <a:ext cx="2468880" cy="320040"/>
+          </a:xfrm>
+          <a:prstGeom prst="rect">
+            <a:avLst/>
+          </a:prstGeom>
+          <a:noFill/>
+        </p:spPr>
+        <p:txBody>
+          <a:bodyPr wrap="square">
+            <a:spAutoFit/>
+          </a:bodyPr>
+          <a:lstStyle/>
+          <a:p>
+            <a:pPr algn="ctr">
               <a:defRPr sz="1100" b="0">
                 <a:solidFill>
-                  <a:srgbClr val="CCCCCC"/>
-                </a:solidFill>
-                <a:latin typeface="Calibri"/>
-              </a:defRPr>
-            </a:pPr>
-            <a:r>
-              <a:t>Apenas 3 falsos negativos em 48 casos malignos. Recall é a métrica mais crítica em diagnóstico médico.</a:t>
-            </a:r>
-          </a:p>
-        </p:txBody>
-      </p:sp>
-      <p:sp>
-        <p:nvSpPr>
-          <p:cNvPr id="36" name="Rectangle 35"/>
+                  <a:srgbClr val="DDDDDD"/>
+                </a:solidFill>
+                <a:latin typeface="Calibri"/>
+              </a:defRPr>
+            </a:pPr>
+            <a:r>
+              <a:t>notas de patologistas</a:t>
+            </a:r>
+          </a:p>
+        </p:txBody>
+      </p:sp>
+    </p:spTree>
+  </p:cSld>
+  <p:clrMapOvr>
+    <a:masterClrMapping/>
+  </p:clrMapOvr>
+</p:sld>
+</file>
+
+<file path=ppt/slides/slide2.xml><?xml version="1.0" encoding="utf-8"?>
+<p:sld xmlns:a="http://schemas.openxmlformats.org/drawingml/2006/main" xmlns:p="http://schemas.openxmlformats.org/presentationml/2006/main" xmlns:r="http://schemas.openxmlformats.org/officeDocument/2006/relationships">
+  <p:cSld>
+    <p:spTree>
+      <p:nvGrpSpPr>
+        <p:cNvPr id="1" name=""/>
+        <p:cNvGrpSpPr/>
+        <p:nvPr/>
+      </p:nvGrpSpPr>
+      <p:grpSpPr/>
+      <p:sp>
+        <p:nvSpPr>
+          <p:cNvPr id="2" name="Rectangle 1"/>
           <p:cNvSpPr/>
           <p:nvPr/>
         </p:nvSpPr>
         <p:spPr>
           <a:xfrm>
-            <a:off x="8595360" y="3840480"/>
-            <a:ext cx="3474720" cy="2011680"/>
+            <a:off x="0" y="0"/>
+            <a:ext cx="109728" cy="6858000"/>
           </a:xfrm>
           <a:prstGeom prst="rect">
             <a:avLst/>
           </a:prstGeom>
           <a:solidFill>
-            <a:srgbClr val="152A3A"/>
+            <a:srgbClr val="1B7A8A"/>
           </a:solidFill>
           <a:ln>
             <a:noFill/>
@@ -5188,14 +3859,14 @@
       </p:sp>
       <p:sp>
         <p:nvSpPr>
-          <p:cNvPr id="37" name="TextBox 36"/>
-          <p:cNvSpPr txBox="1"/>
-          <p:nvPr/>
-        </p:nvSpPr>
-        <p:spPr>
-          <a:xfrm>
-            <a:off x="8778240" y="4023360"/>
-            <a:ext cx="3108960" cy="365760"/>
+          <p:cNvPr id="3" name="TextBox 2"/>
+          <p:cNvSpPr txBox="1"/>
+          <p:nvPr/>
+        </p:nvSpPr>
+        <p:spPr>
+          <a:xfrm>
+            <a:off x="731520" y="320040"/>
+            <a:ext cx="10607040" cy="548640"/>
           </a:xfrm>
           <a:prstGeom prst="rect">
             <a:avLst/>
@@ -5209,65 +3880,29 @@
           <a:lstStyle/>
           <a:p>
             <a:pPr algn="l">
-              <a:defRPr sz="1600" b="1">
+              <a:defRPr sz="3000" b="1">
                 <a:solidFill>
                   <a:srgbClr val="1B7A8A"/>
                 </a:solidFill>
-                <a:latin typeface="Calibri"/>
-              </a:defRPr>
-            </a:pPr>
-            <a:r>
-              <a:t>C4.5 interpretável</a:t>
-            </a:r>
-          </a:p>
-        </p:txBody>
-      </p:sp>
-      <p:sp>
-        <p:nvSpPr>
-          <p:cNvPr id="38" name="TextBox 37"/>
-          <p:cNvSpPr txBox="1"/>
-          <p:nvPr/>
-        </p:nvSpPr>
-        <p:spPr>
-          <a:xfrm>
-            <a:off x="8778240" y="4480560"/>
-            <a:ext cx="3108960" cy="1097280"/>
-          </a:xfrm>
-          <a:prstGeom prst="rect">
-            <a:avLst/>
-          </a:prstGeom>
-          <a:noFill/>
-        </p:spPr>
-        <p:txBody>
-          <a:bodyPr wrap="square">
-            <a:spAutoFit/>
-          </a:bodyPr>
-          <a:lstStyle/>
-          <a:p>
-            <a:pPr algn="l">
-              <a:defRPr sz="1100" b="0">
-                <a:solidFill>
-                  <a:srgbClr val="CCCCCC"/>
-                </a:solidFill>
-                <a:latin typeface="Calibri"/>
-              </a:defRPr>
-            </a:pPr>
-            <a:r>
-              <a:t>15 nós, raiz clara (Uniformity of cell size). Dá pra explicar cada decisão para um médico.</a:t>
-            </a:r>
-          </a:p>
-        </p:txBody>
-      </p:sp>
-      <p:sp>
-        <p:nvSpPr>
-          <p:cNvPr id="39" name="Rectangle 38"/>
+                <a:latin typeface="Calibri Light"/>
+              </a:defRPr>
+            </a:pPr>
+            <a:r>
+              <a:t>Notebook 1: Analise Exploratoria</a:t>
+            </a:r>
+          </a:p>
+        </p:txBody>
+      </p:sp>
+      <p:sp>
+        <p:nvSpPr>
+          <p:cNvPr id="4" name="Rectangle 3"/>
           <p:cNvSpPr/>
           <p:nvPr/>
         </p:nvSpPr>
         <p:spPr>
           <a:xfrm>
-            <a:off x="3200400" y="6217920"/>
-            <a:ext cx="5760720" cy="27432"/>
+            <a:off x="731520" y="6236208"/>
+            <a:ext cx="10607040" cy="27432"/>
           </a:xfrm>
           <a:prstGeom prst="rect">
             <a:avLst/>
@@ -5303,36 +3938,3234 @@
       </p:sp>
       <p:sp>
         <p:nvSpPr>
+          <p:cNvPr id="5" name="TextBox 4"/>
+          <p:cNvSpPr txBox="1"/>
+          <p:nvPr/>
+        </p:nvSpPr>
+        <p:spPr>
+          <a:xfrm>
+            <a:off x="731520" y="6309360"/>
+            <a:ext cx="10607040" cy="365760"/>
+          </a:xfrm>
+          <a:prstGeom prst="rect">
+            <a:avLst/>
+          </a:prstGeom>
+          <a:noFill/>
+        </p:spPr>
+        <p:txBody>
+          <a:bodyPr wrap="square">
+            <a:spAutoFit/>
+          </a:bodyPr>
+          <a:lstStyle/>
+          <a:p>
+            <a:pPr algn="l">
+              <a:defRPr sz="900" b="0">
+                <a:solidFill>
+                  <a:srgbClr val="999999"/>
+                </a:solidFill>
+                <a:latin typeface="Calibri"/>
+              </a:defRPr>
+            </a:pPr>
+            <a:r>
+              <a:t>Etapas 1 a 5  |  683 exemplos validos  |  9 features  |  Quantitativo Discreto  |  Escala Intervalar</a:t>
+            </a:r>
+          </a:p>
+        </p:txBody>
+      </p:sp>
+      <p:sp>
+        <p:nvSpPr>
+          <p:cNvPr id="6" name="TextBox 5"/>
+          <p:cNvSpPr txBox="1"/>
+          <p:nvPr/>
+        </p:nvSpPr>
+        <p:spPr>
+          <a:xfrm>
+            <a:off x="731520" y="1051560"/>
+            <a:ext cx="5303520" cy="274320"/>
+          </a:xfrm>
+          <a:prstGeom prst="rect">
+            <a:avLst/>
+          </a:prstGeom>
+          <a:noFill/>
+        </p:spPr>
+        <p:txBody>
+          <a:bodyPr wrap="square">
+            <a:spAutoFit/>
+          </a:bodyPr>
+          <a:lstStyle/>
+          <a:p>
+            <a:pPr algn="l">
+              <a:defRPr sz="1400" b="1">
+                <a:solidFill>
+                  <a:srgbClr val="1B7A8A"/>
+                </a:solidFill>
+                <a:latin typeface="Calibri"/>
+              </a:defRPr>
+            </a:pPr>
+            <a:r>
+              <a:t>Etapa 1: Atributo Alvo</a:t>
+            </a:r>
+          </a:p>
+        </p:txBody>
+      </p:sp>
+      <p:sp>
+        <p:nvSpPr>
+          <p:cNvPr id="7" name="TextBox 6"/>
+          <p:cNvSpPr txBox="1"/>
+          <p:nvPr/>
+        </p:nvSpPr>
+        <p:spPr>
+          <a:xfrm>
+            <a:off x="731520" y="1371600"/>
+            <a:ext cx="5303520" cy="640080"/>
+          </a:xfrm>
+          <a:prstGeom prst="rect">
+            <a:avLst/>
+          </a:prstGeom>
+          <a:noFill/>
+        </p:spPr>
+        <p:txBody>
+          <a:bodyPr wrap="square">
+            <a:spAutoFit/>
+          </a:bodyPr>
+          <a:lstStyle/>
+          <a:p>
+            <a:pPr algn="l">
+              <a:defRPr sz="1100" b="0">
+                <a:solidFill>
+                  <a:srgbClr val="222222"/>
+                </a:solidFill>
+                <a:latin typeface="Calibri"/>
+              </a:defRPr>
+            </a:pPr>
+            <a:r>
+              <a:t>Class: ultima coluna (indice 9). Classes originais:</a:t>
+            </a:r>
+            <a:br/>
+            <a:r>
+              <a:t>  2 -&gt; 0 (Benigno)  |  4 -&gt; 1 (Maligno)</a:t>
+            </a:r>
+            <a:br/>
+            <a:r>
+              <a:t>Conversao padrao para classificacao binaria.</a:t>
+            </a:r>
+          </a:p>
+        </p:txBody>
+      </p:sp>
+      <p:sp>
+        <p:nvSpPr>
+          <p:cNvPr id="8" name="TextBox 7"/>
+          <p:cNvSpPr txBox="1"/>
+          <p:nvPr/>
+        </p:nvSpPr>
+        <p:spPr>
+          <a:xfrm>
+            <a:off x="731520" y="2103120"/>
+            <a:ext cx="5303520" cy="274320"/>
+          </a:xfrm>
+          <a:prstGeom prst="rect">
+            <a:avLst/>
+          </a:prstGeom>
+          <a:noFill/>
+        </p:spPr>
+        <p:txBody>
+          <a:bodyPr wrap="square">
+            <a:spAutoFit/>
+          </a:bodyPr>
+          <a:lstStyle/>
+          <a:p>
+            <a:pPr algn="l">
+              <a:defRPr sz="1400" b="1">
+                <a:solidFill>
+                  <a:srgbClr val="1B7A8A"/>
+                </a:solidFill>
+                <a:latin typeface="Calibri"/>
+              </a:defRPr>
+            </a:pPr>
+            <a:r>
+              <a:t>Etapa 2: Tipos de Dados</a:t>
+            </a:r>
+          </a:p>
+        </p:txBody>
+      </p:sp>
+      <p:sp>
+        <p:nvSpPr>
+          <p:cNvPr id="9" name="TextBox 8"/>
+          <p:cNvSpPr txBox="1"/>
+          <p:nvPr/>
+        </p:nvSpPr>
+        <p:spPr>
+          <a:xfrm>
+            <a:off x="731520" y="2423160"/>
+            <a:ext cx="5303520" cy="731520"/>
+          </a:xfrm>
+          <a:prstGeom prst="rect">
+            <a:avLst/>
+          </a:prstGeom>
+          <a:noFill/>
+        </p:spPr>
+        <p:txBody>
+          <a:bodyPr wrap="square">
+            <a:spAutoFit/>
+          </a:bodyPr>
+          <a:lstStyle/>
+          <a:p>
+            <a:pPr algn="l">
+              <a:defRPr sz="1100" b="0">
+                <a:solidFill>
+                  <a:srgbClr val="222222"/>
+                </a:solidFill>
+                <a:latin typeface="Calibri"/>
+              </a:defRPr>
+            </a:pPr>
+            <a:r>
+              <a:t>Todos Quantitativo Discreto — notas inteiras de 1 a 10.</a:t>
+            </a:r>
+            <a:br/>
+            <a:r>
+              <a:t>Bare_nuclei aparece como 1.0, 10.0 no CSV, mas o .0</a:t>
+            </a:r>
+            <a:br/>
+            <a:r>
+              <a:t>e so artefato de formatacao — o dado real e inteiro.</a:t>
+            </a:r>
+            <a:br/>
+            <a:r>
+              <a:t>Mitoses: 9 valores distintos; demais: 10 valores.</a:t>
+            </a:r>
+          </a:p>
+        </p:txBody>
+      </p:sp>
+      <p:sp>
+        <p:nvSpPr>
+          <p:cNvPr id="10" name="TextBox 9"/>
+          <p:cNvSpPr txBox="1"/>
+          <p:nvPr/>
+        </p:nvSpPr>
+        <p:spPr>
+          <a:xfrm>
+            <a:off x="731520" y="3291840"/>
+            <a:ext cx="5303520" cy="274320"/>
+          </a:xfrm>
+          <a:prstGeom prst="rect">
+            <a:avLst/>
+          </a:prstGeom>
+          <a:noFill/>
+        </p:spPr>
+        <p:txBody>
+          <a:bodyPr wrap="square">
+            <a:spAutoFit/>
+          </a:bodyPr>
+          <a:lstStyle/>
+          <a:p>
+            <a:pPr algn="l">
+              <a:defRPr sz="1400" b="1">
+                <a:solidFill>
+                  <a:srgbClr val="1B7A8A"/>
+                </a:solidFill>
+                <a:latin typeface="Calibri"/>
+              </a:defRPr>
+            </a:pPr>
+            <a:r>
+              <a:t>Etapa 3: Escala</a:t>
+            </a:r>
+          </a:p>
+        </p:txBody>
+      </p:sp>
+      <p:sp>
+        <p:nvSpPr>
+          <p:cNvPr id="11" name="TextBox 10"/>
+          <p:cNvSpPr txBox="1"/>
+          <p:nvPr/>
+        </p:nvSpPr>
+        <p:spPr>
+          <a:xfrm>
+            <a:off x="731520" y="3611880"/>
+            <a:ext cx="5303520" cy="731520"/>
+          </a:xfrm>
+          <a:prstGeom prst="rect">
+            <a:avLst/>
+          </a:prstGeom>
+          <a:noFill/>
+        </p:spPr>
+        <p:txBody>
+          <a:bodyPr wrap="square">
+            <a:spAutoFit/>
+          </a:bodyPr>
+          <a:lstStyle/>
+          <a:p>
+            <a:pPr algn="l">
+              <a:defRPr sz="1100" b="0">
+                <a:solidFill>
+                  <a:srgbClr val="222222"/>
+                </a:solidFill>
+                <a:latin typeface="Calibri"/>
+              </a:defRPr>
+            </a:pPr>
+            <a:r>
+              <a:t>Intervalar Discreta — intervalos aproximadamente constantes</a:t>
+            </a:r>
+            <a:br/>
+            <a:r>
+              <a:t>entre notas consecutivas. Sem zero absoluto: nota 1 e</a:t>
+            </a:r>
+            <a:br/>
+            <a:r>
+              <a:t>o piso da escala, nao ausencia total da caracteristica.</a:t>
+            </a:r>
+            <a:br/>
+            <a:r>
+              <a:t>Literatura medica trata como intervalar para estatistica parametrica.</a:t>
+            </a:r>
+          </a:p>
+        </p:txBody>
+      </p:sp>
+      <p:sp>
+        <p:nvSpPr>
+          <p:cNvPr id="12" name="TextBox 11"/>
+          <p:cNvSpPr txBox="1"/>
+          <p:nvPr/>
+        </p:nvSpPr>
+        <p:spPr>
+          <a:xfrm>
+            <a:off x="6400800" y="1051560"/>
+            <a:ext cx="5029200" cy="274320"/>
+          </a:xfrm>
+          <a:prstGeom prst="rect">
+            <a:avLst/>
+          </a:prstGeom>
+          <a:noFill/>
+        </p:spPr>
+        <p:txBody>
+          <a:bodyPr wrap="square">
+            <a:spAutoFit/>
+          </a:bodyPr>
+          <a:lstStyle/>
+          <a:p>
+            <a:pPr algn="l">
+              <a:defRPr sz="1400" b="1">
+                <a:solidFill>
+                  <a:srgbClr val="1B7A8A"/>
+                </a:solidFill>
+                <a:latin typeface="Calibri"/>
+              </a:defRPr>
+            </a:pPr>
+            <a:r>
+              <a:t>Etapa 4: Estatisticas Descritivas</a:t>
+            </a:r>
+          </a:p>
+        </p:txBody>
+      </p:sp>
+      <p:sp>
+        <p:nvSpPr>
+          <p:cNvPr id="13" name="TextBox 12"/>
+          <p:cNvSpPr txBox="1"/>
+          <p:nvPr/>
+        </p:nvSpPr>
+        <p:spPr>
+          <a:xfrm>
+            <a:off x="6400800" y="1371600"/>
+            <a:ext cx="2560320" cy="201168"/>
+          </a:xfrm>
+          <a:prstGeom prst="rect">
+            <a:avLst/>
+          </a:prstGeom>
+          <a:noFill/>
+        </p:spPr>
+        <p:txBody>
+          <a:bodyPr wrap="square">
+            <a:spAutoFit/>
+          </a:bodyPr>
+          <a:lstStyle/>
+          <a:p>
+            <a:pPr algn="l">
+              <a:defRPr sz="900" b="1">
+                <a:solidFill>
+                  <a:srgbClr val="1B7A8A"/>
+                </a:solidFill>
+                <a:latin typeface="Calibri"/>
+              </a:defRPr>
+            </a:pPr>
+            <a:r>
+              <a:t>Atributo</a:t>
+            </a:r>
+          </a:p>
+        </p:txBody>
+      </p:sp>
+      <p:sp>
+        <p:nvSpPr>
+          <p:cNvPr id="14" name="TextBox 13"/>
+          <p:cNvSpPr txBox="1"/>
+          <p:nvPr/>
+        </p:nvSpPr>
+        <p:spPr>
+          <a:xfrm>
+            <a:off x="8961120" y="1371600"/>
+            <a:ext cx="731520" cy="201168"/>
+          </a:xfrm>
+          <a:prstGeom prst="rect">
+            <a:avLst/>
+          </a:prstGeom>
+          <a:noFill/>
+        </p:spPr>
+        <p:txBody>
+          <a:bodyPr wrap="square">
+            <a:spAutoFit/>
+          </a:bodyPr>
+          <a:lstStyle/>
+          <a:p>
+            <a:pPr algn="l">
+              <a:defRPr sz="900" b="1">
+                <a:solidFill>
+                  <a:srgbClr val="1B7A8A"/>
+                </a:solidFill>
+                <a:latin typeface="Calibri"/>
+              </a:defRPr>
+            </a:pPr>
+            <a:r>
+              <a:t>Media</a:t>
+            </a:r>
+          </a:p>
+        </p:txBody>
+      </p:sp>
+      <p:sp>
+        <p:nvSpPr>
+          <p:cNvPr id="15" name="TextBox 14"/>
+          <p:cNvSpPr txBox="1"/>
+          <p:nvPr/>
+        </p:nvSpPr>
+        <p:spPr>
+          <a:xfrm>
+            <a:off x="9692640" y="1371600"/>
+            <a:ext cx="731520" cy="201168"/>
+          </a:xfrm>
+          <a:prstGeom prst="rect">
+            <a:avLst/>
+          </a:prstGeom>
+          <a:noFill/>
+        </p:spPr>
+        <p:txBody>
+          <a:bodyPr wrap="square">
+            <a:spAutoFit/>
+          </a:bodyPr>
+          <a:lstStyle/>
+          <a:p>
+            <a:pPr algn="l">
+              <a:defRPr sz="900" b="1">
+                <a:solidFill>
+                  <a:srgbClr val="1B7A8A"/>
+                </a:solidFill>
+                <a:latin typeface="Calibri"/>
+              </a:defRPr>
+            </a:pPr>
+            <a:r>
+              <a:t>Var.</a:t>
+            </a:r>
+          </a:p>
+        </p:txBody>
+      </p:sp>
+      <p:sp>
+        <p:nvSpPr>
+          <p:cNvPr id="16" name="TextBox 15"/>
+          <p:cNvSpPr txBox="1"/>
+          <p:nvPr/>
+        </p:nvSpPr>
+        <p:spPr>
+          <a:xfrm>
+            <a:off x="10424160" y="1371600"/>
+            <a:ext cx="822960" cy="201168"/>
+          </a:xfrm>
+          <a:prstGeom prst="rect">
+            <a:avLst/>
+          </a:prstGeom>
+          <a:noFill/>
+        </p:spPr>
+        <p:txBody>
+          <a:bodyPr wrap="square">
+            <a:spAutoFit/>
+          </a:bodyPr>
+          <a:lstStyle/>
+          <a:p>
+            <a:pPr algn="l">
+              <a:defRPr sz="900" b="1">
+                <a:solidFill>
+                  <a:srgbClr val="1B7A8A"/>
+                </a:solidFill>
+                <a:latin typeface="Calibri"/>
+              </a:defRPr>
+            </a:pPr>
+            <a:r>
+              <a:t>IQR</a:t>
+            </a:r>
+          </a:p>
+        </p:txBody>
+      </p:sp>
+      <p:sp>
+        <p:nvSpPr>
+          <p:cNvPr id="17" name="TextBox 16"/>
+          <p:cNvSpPr txBox="1"/>
+          <p:nvPr/>
+        </p:nvSpPr>
+        <p:spPr>
+          <a:xfrm>
+            <a:off x="6400800" y="1600200"/>
+            <a:ext cx="2560320" cy="201168"/>
+          </a:xfrm>
+          <a:prstGeom prst="rect">
+            <a:avLst/>
+          </a:prstGeom>
+          <a:noFill/>
+        </p:spPr>
+        <p:txBody>
+          <a:bodyPr wrap="square">
+            <a:spAutoFit/>
+          </a:bodyPr>
+          <a:lstStyle/>
+          <a:p>
+            <a:pPr algn="l">
+              <a:defRPr sz="900" b="0">
+                <a:solidFill>
+                  <a:srgbClr val="C0392B"/>
+                </a:solidFill>
+                <a:latin typeface="Calibri"/>
+              </a:defRPr>
+            </a:pPr>
+            <a:r>
+              <a:t>Bare nuclei</a:t>
+            </a:r>
+          </a:p>
+        </p:txBody>
+      </p:sp>
+      <p:sp>
+        <p:nvSpPr>
+          <p:cNvPr id="18" name="TextBox 17"/>
+          <p:cNvSpPr txBox="1"/>
+          <p:nvPr/>
+        </p:nvSpPr>
+        <p:spPr>
+          <a:xfrm>
+            <a:off x="8961120" y="1600200"/>
+            <a:ext cx="731520" cy="201168"/>
+          </a:xfrm>
+          <a:prstGeom prst="rect">
+            <a:avLst/>
+          </a:prstGeom>
+          <a:noFill/>
+        </p:spPr>
+        <p:txBody>
+          <a:bodyPr wrap="square">
+            <a:spAutoFit/>
+          </a:bodyPr>
+          <a:lstStyle/>
+          <a:p>
+            <a:pPr algn="ctr">
+              <a:defRPr sz="900" b="0">
+                <a:solidFill>
+                  <a:srgbClr val="C0392B"/>
+                </a:solidFill>
+                <a:latin typeface="Calibri"/>
+              </a:defRPr>
+            </a:pPr>
+            <a:r>
+              <a:t>3.54</a:t>
+            </a:r>
+          </a:p>
+        </p:txBody>
+      </p:sp>
+      <p:sp>
+        <p:nvSpPr>
+          <p:cNvPr id="19" name="TextBox 18"/>
+          <p:cNvSpPr txBox="1"/>
+          <p:nvPr/>
+        </p:nvSpPr>
+        <p:spPr>
+          <a:xfrm>
+            <a:off x="9692640" y="1600200"/>
+            <a:ext cx="731520" cy="201168"/>
+          </a:xfrm>
+          <a:prstGeom prst="rect">
+            <a:avLst/>
+          </a:prstGeom>
+          <a:noFill/>
+        </p:spPr>
+        <p:txBody>
+          <a:bodyPr wrap="square">
+            <a:spAutoFit/>
+          </a:bodyPr>
+          <a:lstStyle/>
+          <a:p>
+            <a:pPr algn="ctr">
+              <a:defRPr sz="900" b="0">
+                <a:solidFill>
+                  <a:srgbClr val="C0392B"/>
+                </a:solidFill>
+                <a:latin typeface="Calibri"/>
+              </a:defRPr>
+            </a:pPr>
+            <a:r>
+              <a:t>13.28</a:t>
+            </a:r>
+          </a:p>
+        </p:txBody>
+      </p:sp>
+      <p:sp>
+        <p:nvSpPr>
+          <p:cNvPr id="20" name="TextBox 19"/>
+          <p:cNvSpPr txBox="1"/>
+          <p:nvPr/>
+        </p:nvSpPr>
+        <p:spPr>
+          <a:xfrm>
+            <a:off x="10424160" y="1600200"/>
+            <a:ext cx="822960" cy="201168"/>
+          </a:xfrm>
+          <a:prstGeom prst="rect">
+            <a:avLst/>
+          </a:prstGeom>
+          <a:noFill/>
+        </p:spPr>
+        <p:txBody>
+          <a:bodyPr wrap="square">
+            <a:spAutoFit/>
+          </a:bodyPr>
+          <a:lstStyle/>
+          <a:p>
+            <a:pPr algn="ctr">
+              <a:defRPr sz="900" b="0">
+                <a:solidFill>
+                  <a:srgbClr val="C0392B"/>
+                </a:solidFill>
+                <a:latin typeface="Calibri"/>
+              </a:defRPr>
+            </a:pPr>
+            <a:r>
+              <a:t>5.0</a:t>
+            </a:r>
+          </a:p>
+        </p:txBody>
+      </p:sp>
+      <p:sp>
+        <p:nvSpPr>
+          <p:cNvPr id="21" name="TextBox 20"/>
+          <p:cNvSpPr txBox="1"/>
+          <p:nvPr/>
+        </p:nvSpPr>
+        <p:spPr>
+          <a:xfrm>
+            <a:off x="6400800" y="1801368"/>
+            <a:ext cx="2560320" cy="201168"/>
+          </a:xfrm>
+          <a:prstGeom prst="rect">
+            <a:avLst/>
+          </a:prstGeom>
+          <a:noFill/>
+        </p:spPr>
+        <p:txBody>
+          <a:bodyPr wrap="square">
+            <a:spAutoFit/>
+          </a:bodyPr>
+          <a:lstStyle/>
+          <a:p>
+            <a:pPr algn="l">
+              <a:defRPr sz="900" b="0">
+                <a:solidFill>
+                  <a:srgbClr val="222222"/>
+                </a:solidFill>
+                <a:latin typeface="Calibri"/>
+              </a:defRPr>
+            </a:pPr>
+            <a:r>
+              <a:t>Uniformity cell size</a:t>
+            </a:r>
+          </a:p>
+        </p:txBody>
+      </p:sp>
+      <p:sp>
+        <p:nvSpPr>
+          <p:cNvPr id="22" name="TextBox 21"/>
+          <p:cNvSpPr txBox="1"/>
+          <p:nvPr/>
+        </p:nvSpPr>
+        <p:spPr>
+          <a:xfrm>
+            <a:off x="8961120" y="1801368"/>
+            <a:ext cx="731520" cy="201168"/>
+          </a:xfrm>
+          <a:prstGeom prst="rect">
+            <a:avLst/>
+          </a:prstGeom>
+          <a:noFill/>
+        </p:spPr>
+        <p:txBody>
+          <a:bodyPr wrap="square">
+            <a:spAutoFit/>
+          </a:bodyPr>
+          <a:lstStyle/>
+          <a:p>
+            <a:pPr algn="ctr">
+              <a:defRPr sz="900" b="0">
+                <a:solidFill>
+                  <a:srgbClr val="222222"/>
+                </a:solidFill>
+                <a:latin typeface="Calibri"/>
+              </a:defRPr>
+            </a:pPr>
+            <a:r>
+              <a:t>3.15</a:t>
+            </a:r>
+          </a:p>
+        </p:txBody>
+      </p:sp>
+      <p:sp>
+        <p:nvSpPr>
+          <p:cNvPr id="23" name="TextBox 22"/>
+          <p:cNvSpPr txBox="1"/>
+          <p:nvPr/>
+        </p:nvSpPr>
+        <p:spPr>
+          <a:xfrm>
+            <a:off x="9692640" y="1801368"/>
+            <a:ext cx="731520" cy="201168"/>
+          </a:xfrm>
+          <a:prstGeom prst="rect">
+            <a:avLst/>
+          </a:prstGeom>
+          <a:noFill/>
+        </p:spPr>
+        <p:txBody>
+          <a:bodyPr wrap="square">
+            <a:spAutoFit/>
+          </a:bodyPr>
+          <a:lstStyle/>
+          <a:p>
+            <a:pPr algn="ctr">
+              <a:defRPr sz="900" b="0">
+                <a:solidFill>
+                  <a:srgbClr val="222222"/>
+                </a:solidFill>
+                <a:latin typeface="Calibri"/>
+              </a:defRPr>
+            </a:pPr>
+            <a:r>
+              <a:t>9.40</a:t>
+            </a:r>
+          </a:p>
+        </p:txBody>
+      </p:sp>
+      <p:sp>
+        <p:nvSpPr>
+          <p:cNvPr id="24" name="TextBox 23"/>
+          <p:cNvSpPr txBox="1"/>
+          <p:nvPr/>
+        </p:nvSpPr>
+        <p:spPr>
+          <a:xfrm>
+            <a:off x="10424160" y="1801368"/>
+            <a:ext cx="822960" cy="201168"/>
+          </a:xfrm>
+          <a:prstGeom prst="rect">
+            <a:avLst/>
+          </a:prstGeom>
+          <a:noFill/>
+        </p:spPr>
+        <p:txBody>
+          <a:bodyPr wrap="square">
+            <a:spAutoFit/>
+          </a:bodyPr>
+          <a:lstStyle/>
+          <a:p>
+            <a:pPr algn="ctr">
+              <a:defRPr sz="900" b="0">
+                <a:solidFill>
+                  <a:srgbClr val="222222"/>
+                </a:solidFill>
+                <a:latin typeface="Calibri"/>
+              </a:defRPr>
+            </a:pPr>
+            <a:r>
+              <a:t>4.0</a:t>
+            </a:r>
+          </a:p>
+        </p:txBody>
+      </p:sp>
+      <p:sp>
+        <p:nvSpPr>
+          <p:cNvPr id="25" name="TextBox 24"/>
+          <p:cNvSpPr txBox="1"/>
+          <p:nvPr/>
+        </p:nvSpPr>
+        <p:spPr>
+          <a:xfrm>
+            <a:off x="6400800" y="2002536"/>
+            <a:ext cx="2560320" cy="201168"/>
+          </a:xfrm>
+          <a:prstGeom prst="rect">
+            <a:avLst/>
+          </a:prstGeom>
+          <a:noFill/>
+        </p:spPr>
+        <p:txBody>
+          <a:bodyPr wrap="square">
+            <a:spAutoFit/>
+          </a:bodyPr>
+          <a:lstStyle/>
+          <a:p>
+            <a:pPr algn="l">
+              <a:defRPr sz="900" b="0">
+                <a:solidFill>
+                  <a:srgbClr val="222222"/>
+                </a:solidFill>
+                <a:latin typeface="Calibri"/>
+              </a:defRPr>
+            </a:pPr>
+            <a:r>
+              <a:t>Uniformity cell shape</a:t>
+            </a:r>
+          </a:p>
+        </p:txBody>
+      </p:sp>
+      <p:sp>
+        <p:nvSpPr>
+          <p:cNvPr id="26" name="TextBox 25"/>
+          <p:cNvSpPr txBox="1"/>
+          <p:nvPr/>
+        </p:nvSpPr>
+        <p:spPr>
+          <a:xfrm>
+            <a:off x="8961120" y="2002536"/>
+            <a:ext cx="731520" cy="201168"/>
+          </a:xfrm>
+          <a:prstGeom prst="rect">
+            <a:avLst/>
+          </a:prstGeom>
+          <a:noFill/>
+        </p:spPr>
+        <p:txBody>
+          <a:bodyPr wrap="square">
+            <a:spAutoFit/>
+          </a:bodyPr>
+          <a:lstStyle/>
+          <a:p>
+            <a:pPr algn="ctr">
+              <a:defRPr sz="900" b="0">
+                <a:solidFill>
+                  <a:srgbClr val="222222"/>
+                </a:solidFill>
+                <a:latin typeface="Calibri"/>
+              </a:defRPr>
+            </a:pPr>
+            <a:r>
+              <a:t>3.22</a:t>
+            </a:r>
+          </a:p>
+        </p:txBody>
+      </p:sp>
+      <p:sp>
+        <p:nvSpPr>
+          <p:cNvPr id="27" name="TextBox 26"/>
+          <p:cNvSpPr txBox="1"/>
+          <p:nvPr/>
+        </p:nvSpPr>
+        <p:spPr>
+          <a:xfrm>
+            <a:off x="9692640" y="2002536"/>
+            <a:ext cx="731520" cy="201168"/>
+          </a:xfrm>
+          <a:prstGeom prst="rect">
+            <a:avLst/>
+          </a:prstGeom>
+          <a:noFill/>
+        </p:spPr>
+        <p:txBody>
+          <a:bodyPr wrap="square">
+            <a:spAutoFit/>
+          </a:bodyPr>
+          <a:lstStyle/>
+          <a:p>
+            <a:pPr algn="ctr">
+              <a:defRPr sz="900" b="0">
+                <a:solidFill>
+                  <a:srgbClr val="222222"/>
+                </a:solidFill>
+                <a:latin typeface="Calibri"/>
+              </a:defRPr>
+            </a:pPr>
+            <a:r>
+              <a:t>8.93</a:t>
+            </a:r>
+          </a:p>
+        </p:txBody>
+      </p:sp>
+      <p:sp>
+        <p:nvSpPr>
+          <p:cNvPr id="28" name="TextBox 27"/>
+          <p:cNvSpPr txBox="1"/>
+          <p:nvPr/>
+        </p:nvSpPr>
+        <p:spPr>
+          <a:xfrm>
+            <a:off x="10424160" y="2002536"/>
+            <a:ext cx="822960" cy="201168"/>
+          </a:xfrm>
+          <a:prstGeom prst="rect">
+            <a:avLst/>
+          </a:prstGeom>
+          <a:noFill/>
+        </p:spPr>
+        <p:txBody>
+          <a:bodyPr wrap="square">
+            <a:spAutoFit/>
+          </a:bodyPr>
+          <a:lstStyle/>
+          <a:p>
+            <a:pPr algn="ctr">
+              <a:defRPr sz="900" b="0">
+                <a:solidFill>
+                  <a:srgbClr val="222222"/>
+                </a:solidFill>
+                <a:latin typeface="Calibri"/>
+              </a:defRPr>
+            </a:pPr>
+            <a:r>
+              <a:t>4.0</a:t>
+            </a:r>
+          </a:p>
+        </p:txBody>
+      </p:sp>
+      <p:sp>
+        <p:nvSpPr>
+          <p:cNvPr id="29" name="TextBox 28"/>
+          <p:cNvSpPr txBox="1"/>
+          <p:nvPr/>
+        </p:nvSpPr>
+        <p:spPr>
+          <a:xfrm>
+            <a:off x="6400800" y="2203704"/>
+            <a:ext cx="2560320" cy="201168"/>
+          </a:xfrm>
+          <a:prstGeom prst="rect">
+            <a:avLst/>
+          </a:prstGeom>
+          <a:noFill/>
+        </p:spPr>
+        <p:txBody>
+          <a:bodyPr wrap="square">
+            <a:spAutoFit/>
+          </a:bodyPr>
+          <a:lstStyle/>
+          <a:p>
+            <a:pPr algn="l">
+              <a:defRPr sz="900" b="0">
+                <a:solidFill>
+                  <a:srgbClr val="222222"/>
+                </a:solidFill>
+                <a:latin typeface="Calibri"/>
+              </a:defRPr>
+            </a:pPr>
+            <a:r>
+              <a:t>Clump thickness</a:t>
+            </a:r>
+          </a:p>
+        </p:txBody>
+      </p:sp>
+      <p:sp>
+        <p:nvSpPr>
+          <p:cNvPr id="30" name="TextBox 29"/>
+          <p:cNvSpPr txBox="1"/>
+          <p:nvPr/>
+        </p:nvSpPr>
+        <p:spPr>
+          <a:xfrm>
+            <a:off x="8961120" y="2203704"/>
+            <a:ext cx="731520" cy="201168"/>
+          </a:xfrm>
+          <a:prstGeom prst="rect">
+            <a:avLst/>
+          </a:prstGeom>
+          <a:noFill/>
+        </p:spPr>
+        <p:txBody>
+          <a:bodyPr wrap="square">
+            <a:spAutoFit/>
+          </a:bodyPr>
+          <a:lstStyle/>
+          <a:p>
+            <a:pPr algn="ctr">
+              <a:defRPr sz="900" b="0">
+                <a:solidFill>
+                  <a:srgbClr val="222222"/>
+                </a:solidFill>
+                <a:latin typeface="Calibri"/>
+              </a:defRPr>
+            </a:pPr>
+            <a:r>
+              <a:t>4.44</a:t>
+            </a:r>
+          </a:p>
+        </p:txBody>
+      </p:sp>
+      <p:sp>
+        <p:nvSpPr>
+          <p:cNvPr id="31" name="TextBox 30"/>
+          <p:cNvSpPr txBox="1"/>
+          <p:nvPr/>
+        </p:nvSpPr>
+        <p:spPr>
+          <a:xfrm>
+            <a:off x="9692640" y="2203704"/>
+            <a:ext cx="731520" cy="201168"/>
+          </a:xfrm>
+          <a:prstGeom prst="rect">
+            <a:avLst/>
+          </a:prstGeom>
+          <a:noFill/>
+        </p:spPr>
+        <p:txBody>
+          <a:bodyPr wrap="square">
+            <a:spAutoFit/>
+          </a:bodyPr>
+          <a:lstStyle/>
+          <a:p>
+            <a:pPr algn="ctr">
+              <a:defRPr sz="900" b="0">
+                <a:solidFill>
+                  <a:srgbClr val="222222"/>
+                </a:solidFill>
+                <a:latin typeface="Calibri"/>
+              </a:defRPr>
+            </a:pPr>
+            <a:r>
+              <a:t>7.96</a:t>
+            </a:r>
+          </a:p>
+        </p:txBody>
+      </p:sp>
+      <p:sp>
+        <p:nvSpPr>
+          <p:cNvPr id="32" name="TextBox 31"/>
+          <p:cNvSpPr txBox="1"/>
+          <p:nvPr/>
+        </p:nvSpPr>
+        <p:spPr>
+          <a:xfrm>
+            <a:off x="10424160" y="2203704"/>
+            <a:ext cx="822960" cy="201168"/>
+          </a:xfrm>
+          <a:prstGeom prst="rect">
+            <a:avLst/>
+          </a:prstGeom>
+          <a:noFill/>
+        </p:spPr>
+        <p:txBody>
+          <a:bodyPr wrap="square">
+            <a:spAutoFit/>
+          </a:bodyPr>
+          <a:lstStyle/>
+          <a:p>
+            <a:pPr algn="ctr">
+              <a:defRPr sz="900" b="0">
+                <a:solidFill>
+                  <a:srgbClr val="222222"/>
+                </a:solidFill>
+                <a:latin typeface="Calibri"/>
+              </a:defRPr>
+            </a:pPr>
+            <a:r>
+              <a:t>4.0</a:t>
+            </a:r>
+          </a:p>
+        </p:txBody>
+      </p:sp>
+      <p:sp>
+        <p:nvSpPr>
+          <p:cNvPr id="33" name="TextBox 32"/>
+          <p:cNvSpPr txBox="1"/>
+          <p:nvPr/>
+        </p:nvSpPr>
+        <p:spPr>
+          <a:xfrm>
+            <a:off x="6400800" y="2404872"/>
+            <a:ext cx="2560320" cy="201168"/>
+          </a:xfrm>
+          <a:prstGeom prst="rect">
+            <a:avLst/>
+          </a:prstGeom>
+          <a:noFill/>
+        </p:spPr>
+        <p:txBody>
+          <a:bodyPr wrap="square">
+            <a:spAutoFit/>
+          </a:bodyPr>
+          <a:lstStyle/>
+          <a:p>
+            <a:pPr algn="l">
+              <a:defRPr sz="900" b="0">
+                <a:solidFill>
+                  <a:srgbClr val="222222"/>
+                </a:solidFill>
+                <a:latin typeface="Calibri"/>
+              </a:defRPr>
+            </a:pPr>
+            <a:r>
+              <a:t>Mitoses</a:t>
+            </a:r>
+          </a:p>
+        </p:txBody>
+      </p:sp>
+      <p:sp>
+        <p:nvSpPr>
+          <p:cNvPr id="34" name="TextBox 33"/>
+          <p:cNvSpPr txBox="1"/>
+          <p:nvPr/>
+        </p:nvSpPr>
+        <p:spPr>
+          <a:xfrm>
+            <a:off x="8961120" y="2404872"/>
+            <a:ext cx="731520" cy="201168"/>
+          </a:xfrm>
+          <a:prstGeom prst="rect">
+            <a:avLst/>
+          </a:prstGeom>
+          <a:noFill/>
+        </p:spPr>
+        <p:txBody>
+          <a:bodyPr wrap="square">
+            <a:spAutoFit/>
+          </a:bodyPr>
+          <a:lstStyle/>
+          <a:p>
+            <a:pPr algn="ctr">
+              <a:defRPr sz="900" b="0">
+                <a:solidFill>
+                  <a:srgbClr val="222222"/>
+                </a:solidFill>
+                <a:latin typeface="Calibri"/>
+              </a:defRPr>
+            </a:pPr>
+            <a:r>
+              <a:t>1.60</a:t>
+            </a:r>
+          </a:p>
+        </p:txBody>
+      </p:sp>
+      <p:sp>
+        <p:nvSpPr>
+          <p:cNvPr id="35" name="TextBox 34"/>
+          <p:cNvSpPr txBox="1"/>
+          <p:nvPr/>
+        </p:nvSpPr>
+        <p:spPr>
+          <a:xfrm>
+            <a:off x="9692640" y="2404872"/>
+            <a:ext cx="731520" cy="201168"/>
+          </a:xfrm>
+          <a:prstGeom prst="rect">
+            <a:avLst/>
+          </a:prstGeom>
+          <a:noFill/>
+        </p:spPr>
+        <p:txBody>
+          <a:bodyPr wrap="square">
+            <a:spAutoFit/>
+          </a:bodyPr>
+          <a:lstStyle/>
+          <a:p>
+            <a:pPr algn="ctr">
+              <a:defRPr sz="900" b="0">
+                <a:solidFill>
+                  <a:srgbClr val="222222"/>
+                </a:solidFill>
+                <a:latin typeface="Calibri"/>
+              </a:defRPr>
+            </a:pPr>
+            <a:r>
+              <a:t>3.00</a:t>
+            </a:r>
+          </a:p>
+        </p:txBody>
+      </p:sp>
+      <p:sp>
+        <p:nvSpPr>
+          <p:cNvPr id="36" name="TextBox 35"/>
+          <p:cNvSpPr txBox="1"/>
+          <p:nvPr/>
+        </p:nvSpPr>
+        <p:spPr>
+          <a:xfrm>
+            <a:off x="10424160" y="2404872"/>
+            <a:ext cx="822960" cy="201168"/>
+          </a:xfrm>
+          <a:prstGeom prst="rect">
+            <a:avLst/>
+          </a:prstGeom>
+          <a:noFill/>
+        </p:spPr>
+        <p:txBody>
+          <a:bodyPr wrap="square">
+            <a:spAutoFit/>
+          </a:bodyPr>
+          <a:lstStyle/>
+          <a:p>
+            <a:pPr algn="ctr">
+              <a:defRPr sz="900" b="0">
+                <a:solidFill>
+                  <a:srgbClr val="222222"/>
+                </a:solidFill>
+                <a:latin typeface="Calibri"/>
+              </a:defRPr>
+            </a:pPr>
+            <a:r>
+              <a:t>0.0</a:t>
+            </a:r>
+          </a:p>
+        </p:txBody>
+      </p:sp>
+      <p:sp>
+        <p:nvSpPr>
+          <p:cNvPr id="37" name="TextBox 36"/>
+          <p:cNvSpPr txBox="1"/>
+          <p:nvPr/>
+        </p:nvSpPr>
+        <p:spPr>
+          <a:xfrm>
+            <a:off x="6400800" y="2697480"/>
+            <a:ext cx="5029200" cy="640080"/>
+          </a:xfrm>
+          <a:prstGeom prst="rect">
+            <a:avLst/>
+          </a:prstGeom>
+          <a:noFill/>
+        </p:spPr>
+        <p:txBody>
+          <a:bodyPr wrap="square">
+            <a:spAutoFit/>
+          </a:bodyPr>
+          <a:lstStyle/>
+          <a:p>
+            <a:pPr algn="l">
+              <a:defRPr sz="1000" b="0">
+                <a:solidFill>
+                  <a:srgbClr val="222222"/>
+                </a:solidFill>
+                <a:latin typeface="Calibri"/>
+              </a:defRPr>
+            </a:pPr>
+            <a:r>
+              <a:t>Bare_nuclei: maior variancia (13.28) e IQR (5.0) — melhor discriminador.</a:t>
+            </a:r>
+            <a:br/>
+            <a:r>
+              <a:t>Mitoses: IQR = 0.0 — maioria absoluta dos valores = 1. Menos informativo.</a:t>
+            </a:r>
+            <a:br/>
+            <a:r>
+              <a:t>Moda = 1 na maioria dos atributos. Dados assimetricos a direita.</a:t>
+            </a:r>
+          </a:p>
+        </p:txBody>
+      </p:sp>
+      <p:sp>
+        <p:nvSpPr>
+          <p:cNvPr id="38" name="TextBox 37"/>
+          <p:cNvSpPr txBox="1"/>
+          <p:nvPr/>
+        </p:nvSpPr>
+        <p:spPr>
+          <a:xfrm>
+            <a:off x="6400800" y="3429000"/>
+            <a:ext cx="5029200" cy="274320"/>
+          </a:xfrm>
+          <a:prstGeom prst="rect">
+            <a:avLst/>
+          </a:prstGeom>
+          <a:noFill/>
+        </p:spPr>
+        <p:txBody>
+          <a:bodyPr wrap="square">
+            <a:spAutoFit/>
+          </a:bodyPr>
+          <a:lstStyle/>
+          <a:p>
+            <a:pPr algn="l">
+              <a:defRPr sz="1400" b="1">
+                <a:solidFill>
+                  <a:srgbClr val="1B7A8A"/>
+                </a:solidFill>
+                <a:latin typeface="Calibri"/>
+              </a:defRPr>
+            </a:pPr>
+            <a:r>
+              <a:t>Distribuicao das Classes</a:t>
+            </a:r>
+          </a:p>
+        </p:txBody>
+      </p:sp>
+      <p:sp>
+        <p:nvSpPr>
+          <p:cNvPr id="39" name="TextBox 38"/>
+          <p:cNvSpPr txBox="1"/>
+          <p:nvPr/>
+        </p:nvSpPr>
+        <p:spPr>
+          <a:xfrm>
+            <a:off x="6400800" y="3749039"/>
+            <a:ext cx="5029200" cy="548640"/>
+          </a:xfrm>
+          <a:prstGeom prst="rect">
+            <a:avLst/>
+          </a:prstGeom>
+          <a:noFill/>
+        </p:spPr>
+        <p:txBody>
+          <a:bodyPr wrap="square">
+            <a:spAutoFit/>
+          </a:bodyPr>
+          <a:lstStyle/>
+          <a:p>
+            <a:pPr algn="l">
+              <a:defRPr sz="1100" b="0">
+                <a:solidFill>
+                  <a:srgbClr val="222222"/>
+                </a:solidFill>
+                <a:latin typeface="Calibri"/>
+              </a:defRPr>
+            </a:pPr>
+            <a:r>
+              <a:t>Benignos (0): 444 (65.0%)  |  Malignos (1): 239 (35.0%)</a:t>
+            </a:r>
+            <a:br/>
+            <a:r>
+              <a:t>Razao benigno/maligno: 1.86:1 — relativamente balanceado</a:t>
+            </a:r>
+          </a:p>
+        </p:txBody>
+      </p:sp>
+      <p:sp>
+        <p:nvSpPr>
           <p:cNvPr id="40" name="TextBox 39"/>
           <p:cNvSpPr txBox="1"/>
           <p:nvPr/>
         </p:nvSpPr>
         <p:spPr>
           <a:xfrm>
+            <a:off x="6400800" y="4434840"/>
+            <a:ext cx="5029200" cy="274320"/>
+          </a:xfrm>
+          <a:prstGeom prst="rect">
+            <a:avLst/>
+          </a:prstGeom>
+          <a:noFill/>
+        </p:spPr>
+        <p:txBody>
+          <a:bodyPr wrap="square">
+            <a:spAutoFit/>
+          </a:bodyPr>
+          <a:lstStyle/>
+          <a:p>
+            <a:pPr algn="l">
+              <a:defRPr sz="1400" b="1">
+                <a:solidFill>
+                  <a:srgbClr val="1B7A8A"/>
+                </a:solidFill>
+                <a:latin typeface="Calibri"/>
+              </a:defRPr>
+            </a:pPr>
+            <a:r>
+              <a:t>Etapa 5: Separacao Treino/Teste</a:t>
+            </a:r>
+          </a:p>
+        </p:txBody>
+      </p:sp>
+      <p:sp>
+        <p:nvSpPr>
+          <p:cNvPr id="41" name="TextBox 40"/>
+          <p:cNvSpPr txBox="1"/>
+          <p:nvPr/>
+        </p:nvSpPr>
+        <p:spPr>
+          <a:xfrm>
+            <a:off x="6400800" y="4754880"/>
+            <a:ext cx="5029200" cy="822960"/>
+          </a:xfrm>
+          <a:prstGeom prst="rect">
+            <a:avLst/>
+          </a:prstGeom>
+          <a:noFill/>
+        </p:spPr>
+        <p:txBody>
+          <a:bodyPr wrap="square">
+            <a:spAutoFit/>
+          </a:bodyPr>
+          <a:lstStyle/>
+          <a:p>
+            <a:pPr algn="l">
+              <a:defRPr sz="1100" b="0">
+                <a:solidFill>
+                  <a:srgbClr val="222222"/>
+                </a:solidFill>
+                <a:latin typeface="Calibri"/>
+              </a:defRPr>
+            </a:pPr>
+            <a:r>
+              <a:t>Hold-out 80/20 estratificado (seed=42).</a:t>
+            </a:r>
+            <a:br/>
+            <a:r>
+              <a:t>Treino: 546 exemplos (355 benignos, 191 malignos)</a:t>
+            </a:r>
+            <a:br/>
+            <a:r>
+              <a:t>Teste: 137 exemplos (89 benignos, 48 malignos)</a:t>
+            </a:r>
+            <a:br/>
+            <a:r>
+              <a:t>Proporcao de malignos preservada nos dois conjuntos (~35%).</a:t>
+            </a:r>
+          </a:p>
+        </p:txBody>
+      </p:sp>
+      <p:sp>
+        <p:nvSpPr>
+          <p:cNvPr id="42" name="TextBox 41"/>
+          <p:cNvSpPr txBox="1"/>
+          <p:nvPr/>
+        </p:nvSpPr>
+        <p:spPr>
+          <a:xfrm>
+            <a:off x="731520" y="4572000"/>
+            <a:ext cx="5303520" cy="274320"/>
+          </a:xfrm>
+          <a:prstGeom prst="rect">
+            <a:avLst/>
+          </a:prstGeom>
+          <a:noFill/>
+        </p:spPr>
+        <p:txBody>
+          <a:bodyPr wrap="square">
+            <a:spAutoFit/>
+          </a:bodyPr>
+          <a:lstStyle/>
+          <a:p>
+            <a:pPr algn="l">
+              <a:defRPr sz="1400" b="1">
+                <a:solidFill>
+                  <a:srgbClr val="1B7A8A"/>
+                </a:solidFill>
+                <a:latin typeface="Calibri"/>
+              </a:defRPr>
+            </a:pPr>
+            <a:r>
+              <a:t>Graficos Gerados (3)</a:t>
+            </a:r>
+          </a:p>
+        </p:txBody>
+      </p:sp>
+      <p:sp>
+        <p:nvSpPr>
+          <p:cNvPr id="43" name="TextBox 42"/>
+          <p:cNvSpPr txBox="1"/>
+          <p:nvPr/>
+        </p:nvSpPr>
+        <p:spPr>
+          <a:xfrm>
+            <a:off x="731520" y="4892040"/>
+            <a:ext cx="5303520" cy="1097280"/>
+          </a:xfrm>
+          <a:prstGeom prst="rect">
+            <a:avLst/>
+          </a:prstGeom>
+          <a:noFill/>
+        </p:spPr>
+        <p:txBody>
+          <a:bodyPr wrap="square">
+            <a:spAutoFit/>
+          </a:bodyPr>
+          <a:lstStyle/>
+          <a:p>
+            <a:pPr algn="l">
+              <a:defRPr sz="1000" b="0">
+                <a:solidFill>
+                  <a:srgbClr val="222222"/>
+                </a:solidFill>
+                <a:latin typeface="Calibri"/>
+              </a:defRPr>
+            </a:pPr>
+            <a:r>
+              <a:t>histogramas_por_classe.png — grid 3x3, benigno vs maligno</a:t>
+            </a:r>
+            <a:br/>
+            <a:r>
+              <a:t>boxplots_por_classe.png — grid 3x3, comparativo</a:t>
+            </a:r>
+            <a:br/>
+            <a:r>
+              <a:t>distribuicao_classes.png — barras, proporcao das classes</a:t>
+            </a:r>
+          </a:p>
+        </p:txBody>
+      </p:sp>
+    </p:spTree>
+  </p:cSld>
+  <p:clrMapOvr>
+    <a:masterClrMapping/>
+  </p:clrMapOvr>
+</p:sld>
+</file>
+
+<file path=ppt/slides/slide3.xml><?xml version="1.0" encoding="utf-8"?>
+<p:sld xmlns:a="http://schemas.openxmlformats.org/drawingml/2006/main" xmlns:p="http://schemas.openxmlformats.org/presentationml/2006/main" xmlns:r="http://schemas.openxmlformats.org/officeDocument/2006/relationships">
+  <p:cSld>
+    <p:spTree>
+      <p:nvGrpSpPr>
+        <p:cNvPr id="1" name=""/>
+        <p:cNvGrpSpPr/>
+        <p:nvPr/>
+      </p:nvGrpSpPr>
+      <p:grpSpPr/>
+      <p:sp>
+        <p:nvSpPr>
+          <p:cNvPr id="2" name="Rectangle 1"/>
+          <p:cNvSpPr/>
+          <p:nvPr/>
+        </p:nvSpPr>
+        <p:spPr>
+          <a:xfrm>
+            <a:off x="0" y="0"/>
+            <a:ext cx="109728" cy="6858000"/>
+          </a:xfrm>
+          <a:prstGeom prst="rect">
+            <a:avLst/>
+          </a:prstGeom>
+          <a:solidFill>
+            <a:srgbClr val="1B7A8A"/>
+          </a:solidFill>
+          <a:ln>
+            <a:noFill/>
+          </a:ln>
+        </p:spPr>
+        <p:style>
+          <a:lnRef idx="1">
+            <a:schemeClr val="accent1"/>
+          </a:lnRef>
+          <a:fillRef idx="3">
+            <a:schemeClr val="accent1"/>
+          </a:fillRef>
+          <a:effectRef idx="2">
+            <a:schemeClr val="accent1"/>
+          </a:effectRef>
+          <a:fontRef idx="minor">
+            <a:schemeClr val="lt1"/>
+          </a:fontRef>
+        </p:style>
+        <p:txBody>
+          <a:bodyPr rtlCol="0" anchor="ctr"/>
+          <a:lstStyle/>
+          <a:p>
+            <a:pPr algn="ctr"/>
+          </a:p>
+        </p:txBody>
+      </p:sp>
+      <p:sp>
+        <p:nvSpPr>
+          <p:cNvPr id="3" name="TextBox 2"/>
+          <p:cNvSpPr txBox="1"/>
+          <p:nvPr/>
+        </p:nvSpPr>
+        <p:spPr>
+          <a:xfrm>
+            <a:off x="731520" y="320040"/>
+            <a:ext cx="10607040" cy="548640"/>
+          </a:xfrm>
+          <a:prstGeom prst="rect">
+            <a:avLst/>
+          </a:prstGeom>
+          <a:noFill/>
+        </p:spPr>
+        <p:txBody>
+          <a:bodyPr wrap="square">
+            <a:spAutoFit/>
+          </a:bodyPr>
+          <a:lstStyle/>
+          <a:p>
+            <a:pPr algn="l">
+              <a:defRPr sz="3000" b="1">
+                <a:solidFill>
+                  <a:srgbClr val="1B7A8A"/>
+                </a:solidFill>
+                <a:latin typeface="Calibri Light"/>
+              </a:defRPr>
+            </a:pPr>
+            <a:r>
+              <a:t>Notebook 2: Pre-processamento</a:t>
+            </a:r>
+          </a:p>
+        </p:txBody>
+      </p:sp>
+      <p:sp>
+        <p:nvSpPr>
+          <p:cNvPr id="4" name="Rectangle 3"/>
+          <p:cNvSpPr/>
+          <p:nvPr/>
+        </p:nvSpPr>
+        <p:spPr>
+          <a:xfrm>
+            <a:off x="731520" y="6236208"/>
+            <a:ext cx="10607040" cy="27432"/>
+          </a:xfrm>
+          <a:prstGeom prst="rect">
+            <a:avLst/>
+          </a:prstGeom>
+          <a:solidFill>
+            <a:srgbClr val="1B7A8A"/>
+          </a:solidFill>
+          <a:ln>
+            <a:noFill/>
+          </a:ln>
+        </p:spPr>
+        <p:style>
+          <a:lnRef idx="1">
+            <a:schemeClr val="accent1"/>
+          </a:lnRef>
+          <a:fillRef idx="3">
+            <a:schemeClr val="accent1"/>
+          </a:fillRef>
+          <a:effectRef idx="2">
+            <a:schemeClr val="accent1"/>
+          </a:effectRef>
+          <a:fontRef idx="minor">
+            <a:schemeClr val="lt1"/>
+          </a:fontRef>
+        </p:style>
+        <p:txBody>
+          <a:bodyPr rtlCol="0" anchor="ctr"/>
+          <a:lstStyle/>
+          <a:p>
+            <a:pPr algn="ctr"/>
+          </a:p>
+        </p:txBody>
+      </p:sp>
+      <p:sp>
+        <p:nvSpPr>
+          <p:cNvPr id="5" name="TextBox 4"/>
+          <p:cNvSpPr txBox="1"/>
+          <p:nvPr/>
+        </p:nvSpPr>
+        <p:spPr>
+          <a:xfrm>
             <a:off x="731520" y="6309360"/>
-            <a:ext cx="10698480" cy="457200"/>
-          </a:xfrm>
-          <a:prstGeom prst="rect">
-            <a:avLst/>
-          </a:prstGeom>
-          <a:noFill/>
-        </p:spPr>
-        <p:txBody>
-          <a:bodyPr wrap="square">
-            <a:spAutoFit/>
-          </a:bodyPr>
-          <a:lstStyle/>
-          <a:p>
-            <a:pPr algn="ctr">
-              <a:defRPr sz="1100" b="0">
-                <a:solidFill>
-                  <a:srgbClr val="8899AA"/>
-                </a:solidFill>
-                <a:latin typeface="Calibri"/>
-              </a:defRPr>
-            </a:pPr>
-            <a:r>
-              <a:t>Todos os algoritmos implementados do zero com Python puro — sem scikit-learn, pandas ou numpy</a:t>
+            <a:ext cx="10607040" cy="365760"/>
+          </a:xfrm>
+          <a:prstGeom prst="rect">
+            <a:avLst/>
+          </a:prstGeom>
+          <a:noFill/>
+        </p:spPr>
+        <p:txBody>
+          <a:bodyPr wrap="square">
+            <a:spAutoFit/>
+          </a:bodyPr>
+          <a:lstStyle/>
+          <a:p>
+            <a:pPr algn="l">
+              <a:defRPr sz="900" b="0">
+                <a:solidFill>
+                  <a:srgbClr val="999999"/>
+                </a:solidFill>
+                <a:latin typeface="Calibri"/>
+              </a:defRPr>
+            </a:pPr>
+            <a:r>
+              <a:t>Etapas 6 a 10  |  546 -&gt; 362 exemplos apos limpeza  |  Min-Max [0,1]  |  Pearson: 9/9 features mantidas</a:t>
+            </a:r>
+          </a:p>
+        </p:txBody>
+      </p:sp>
+      <p:sp>
+        <p:nvSpPr>
+          <p:cNvPr id="6" name="Rectangle 5"/>
+          <p:cNvSpPr/>
+          <p:nvPr/>
+        </p:nvSpPr>
+        <p:spPr>
+          <a:xfrm>
+            <a:off x="731520" y="1097280"/>
+            <a:ext cx="5120640" cy="1554480"/>
+          </a:xfrm>
+          <a:prstGeom prst="rect">
+            <a:avLst/>
+          </a:prstGeom>
+          <a:solidFill>
+            <a:srgbClr val="1B7A8A"/>
+          </a:solidFill>
+          <a:ln>
+            <a:noFill/>
+          </a:ln>
+        </p:spPr>
+        <p:style>
+          <a:lnRef idx="1">
+            <a:schemeClr val="accent1"/>
+          </a:lnRef>
+          <a:fillRef idx="3">
+            <a:schemeClr val="accent1"/>
+          </a:fillRef>
+          <a:effectRef idx="2">
+            <a:schemeClr val="accent1"/>
+          </a:effectRef>
+          <a:fontRef idx="minor">
+            <a:schemeClr val="lt1"/>
+          </a:fontRef>
+        </p:style>
+        <p:txBody>
+          <a:bodyPr rtlCol="0" anchor="ctr"/>
+          <a:lstStyle/>
+          <a:p>
+            <a:pPr algn="ctr"/>
+          </a:p>
+        </p:txBody>
+      </p:sp>
+      <p:sp>
+        <p:nvSpPr>
+          <p:cNvPr id="7" name="TextBox 6"/>
+          <p:cNvSpPr txBox="1"/>
+          <p:nvPr/>
+        </p:nvSpPr>
+        <p:spPr>
+          <a:xfrm>
+            <a:off x="868680" y="1188720"/>
+            <a:ext cx="4846320" cy="274320"/>
+          </a:xfrm>
+          <a:prstGeom prst="rect">
+            <a:avLst/>
+          </a:prstGeom>
+          <a:noFill/>
+        </p:spPr>
+        <p:txBody>
+          <a:bodyPr wrap="square">
+            <a:spAutoFit/>
+          </a:bodyPr>
+          <a:lstStyle/>
+          <a:p>
+            <a:pPr algn="l">
+              <a:defRPr sz="1300" b="1">
+                <a:solidFill>
+                  <a:srgbClr val="FFFFFF"/>
+                </a:solidFill>
+                <a:latin typeface="Calibri"/>
+              </a:defRPr>
+            </a:pPr>
+            <a:r>
+              <a:t>Etapa 6: Eliminacao</a:t>
+            </a:r>
+          </a:p>
+        </p:txBody>
+      </p:sp>
+      <p:sp>
+        <p:nvSpPr>
+          <p:cNvPr id="8" name="TextBox 7"/>
+          <p:cNvSpPr txBox="1"/>
+          <p:nvPr/>
+        </p:nvSpPr>
+        <p:spPr>
+          <a:xfrm>
+            <a:off x="868680" y="1508760"/>
+            <a:ext cx="4846320" cy="1051560"/>
+          </a:xfrm>
+          <a:prstGeom prst="rect">
+            <a:avLst/>
+          </a:prstGeom>
+          <a:noFill/>
+        </p:spPr>
+        <p:txBody>
+          <a:bodyPr wrap="square">
+            <a:spAutoFit/>
+          </a:bodyPr>
+          <a:lstStyle/>
+          <a:p>
+            <a:pPr algn="l">
+              <a:defRPr sz="1050" b="0">
+                <a:solidFill>
+                  <a:srgbClr val="DDDDDD"/>
+                </a:solidFill>
+                <a:latin typeface="Calibri"/>
+              </a:defRPr>
+            </a:pPr>
+            <a:r>
+              <a:t>0 colunas removidas (variancia &gt; 0 em todas).</a:t>
+            </a:r>
+            <a:br/>
+            <a:r>
+              <a:t>184 duplicatas removidas — inflavam artificialmente</a:t>
+            </a:r>
+            <a:br/>
+            <a:r>
+              <a:t>padroes no treino. 546 -&gt; 362 exemplos.</a:t>
+            </a:r>
+          </a:p>
+        </p:txBody>
+      </p:sp>
+      <p:sp>
+        <p:nvSpPr>
+          <p:cNvPr id="9" name="Rectangle 8"/>
+          <p:cNvSpPr/>
+          <p:nvPr/>
+        </p:nvSpPr>
+        <p:spPr>
+          <a:xfrm>
+            <a:off x="6217920" y="1097280"/>
+            <a:ext cx="5120640" cy="1554480"/>
+          </a:xfrm>
+          <a:prstGeom prst="rect">
+            <a:avLst/>
+          </a:prstGeom>
+          <a:solidFill>
+            <a:srgbClr val="152A3A"/>
+          </a:solidFill>
+          <a:ln>
+            <a:noFill/>
+          </a:ln>
+        </p:spPr>
+        <p:style>
+          <a:lnRef idx="1">
+            <a:schemeClr val="accent1"/>
+          </a:lnRef>
+          <a:fillRef idx="3">
+            <a:schemeClr val="accent1"/>
+          </a:fillRef>
+          <a:effectRef idx="2">
+            <a:schemeClr val="accent1"/>
+          </a:effectRef>
+          <a:fontRef idx="minor">
+            <a:schemeClr val="lt1"/>
+          </a:fontRef>
+        </p:style>
+        <p:txBody>
+          <a:bodyPr rtlCol="0" anchor="ctr"/>
+          <a:lstStyle/>
+          <a:p>
+            <a:pPr algn="ctr"/>
+          </a:p>
+        </p:txBody>
+      </p:sp>
+      <p:sp>
+        <p:nvSpPr>
+          <p:cNvPr id="10" name="TextBox 9"/>
+          <p:cNvSpPr txBox="1"/>
+          <p:nvPr/>
+        </p:nvSpPr>
+        <p:spPr>
+          <a:xfrm>
+            <a:off x="6355080" y="1188720"/>
+            <a:ext cx="4846320" cy="274320"/>
+          </a:xfrm>
+          <a:prstGeom prst="rect">
+            <a:avLst/>
+          </a:prstGeom>
+          <a:noFill/>
+        </p:spPr>
+        <p:txBody>
+          <a:bodyPr wrap="square">
+            <a:spAutoFit/>
+          </a:bodyPr>
+          <a:lstStyle/>
+          <a:p>
+            <a:pPr algn="l">
+              <a:defRPr sz="1300" b="1">
+                <a:solidFill>
+                  <a:srgbClr val="FFFFFF"/>
+                </a:solidFill>
+                <a:latin typeface="Calibri"/>
+              </a:defRPr>
+            </a:pPr>
+            <a:r>
+              <a:t>Etapa 7: Desbalanceamento</a:t>
+            </a:r>
+          </a:p>
+        </p:txBody>
+      </p:sp>
+      <p:sp>
+        <p:nvSpPr>
+          <p:cNvPr id="11" name="TextBox 10"/>
+          <p:cNvSpPr txBox="1"/>
+          <p:nvPr/>
+        </p:nvSpPr>
+        <p:spPr>
+          <a:xfrm>
+            <a:off x="6355080" y="1508760"/>
+            <a:ext cx="4846320" cy="1051560"/>
+          </a:xfrm>
+          <a:prstGeom prst="rect">
+            <a:avLst/>
+          </a:prstGeom>
+          <a:noFill/>
+        </p:spPr>
+        <p:txBody>
+          <a:bodyPr wrap="square">
+            <a:spAutoFit/>
+          </a:bodyPr>
+          <a:lstStyle/>
+          <a:p>
+            <a:pPr algn="l">
+              <a:defRPr sz="1050" b="0">
+                <a:solidFill>
+                  <a:srgbClr val="DDDDDD"/>
+                </a:solidFill>
+                <a:latin typeface="Calibri"/>
+              </a:defRPr>
+            </a:pPr>
+            <a:r>
+              <a:t>Apos limpeza: 48% benigno (173), 52% maligno (189).</a:t>
+            </a:r>
+            <a:br/>
+            <a:r>
+              <a:t>Razao 1.09:1 — naturalmente balanceado.</a:t>
+            </a:r>
+            <a:br/>
+            <a:r>
+              <a:t>SEM SMOTE: intervencao artificial faria mais mal que bem.</a:t>
+            </a:r>
+          </a:p>
+        </p:txBody>
+      </p:sp>
+      <p:sp>
+        <p:nvSpPr>
+          <p:cNvPr id="12" name="Rectangle 11"/>
+          <p:cNvSpPr/>
+          <p:nvPr/>
+        </p:nvSpPr>
+        <p:spPr>
+          <a:xfrm>
+            <a:off x="731520" y="2834640"/>
+            <a:ext cx="5120640" cy="1554480"/>
+          </a:xfrm>
+          <a:prstGeom prst="rect">
+            <a:avLst/>
+          </a:prstGeom>
+          <a:solidFill>
+            <a:srgbClr val="1B7A8A"/>
+          </a:solidFill>
+          <a:ln>
+            <a:noFill/>
+          </a:ln>
+        </p:spPr>
+        <p:style>
+          <a:lnRef idx="1">
+            <a:schemeClr val="accent1"/>
+          </a:lnRef>
+          <a:fillRef idx="3">
+            <a:schemeClr val="accent1"/>
+          </a:fillRef>
+          <a:effectRef idx="2">
+            <a:schemeClr val="accent1"/>
+          </a:effectRef>
+          <a:fontRef idx="minor">
+            <a:schemeClr val="lt1"/>
+          </a:fontRef>
+        </p:style>
+        <p:txBody>
+          <a:bodyPr rtlCol="0" anchor="ctr"/>
+          <a:lstStyle/>
+          <a:p>
+            <a:pPr algn="ctr"/>
+          </a:p>
+        </p:txBody>
+      </p:sp>
+      <p:sp>
+        <p:nvSpPr>
+          <p:cNvPr id="13" name="TextBox 12"/>
+          <p:cNvSpPr txBox="1"/>
+          <p:nvPr/>
+        </p:nvSpPr>
+        <p:spPr>
+          <a:xfrm>
+            <a:off x="868680" y="2926080"/>
+            <a:ext cx="4846320" cy="274320"/>
+          </a:xfrm>
+          <a:prstGeom prst="rect">
+            <a:avLst/>
+          </a:prstGeom>
+          <a:noFill/>
+        </p:spPr>
+        <p:txBody>
+          <a:bodyPr wrap="square">
+            <a:spAutoFit/>
+          </a:bodyPr>
+          <a:lstStyle/>
+          <a:p>
+            <a:pPr algn="l">
+              <a:defRPr sz="1300" b="1">
+                <a:solidFill>
+                  <a:srgbClr val="FFFFFF"/>
+                </a:solidFill>
+                <a:latin typeface="Calibri"/>
+              </a:defRPr>
+            </a:pPr>
+            <a:r>
+              <a:t>Etapa 8a: Outliers (IQR)</a:t>
+            </a:r>
+          </a:p>
+        </p:txBody>
+      </p:sp>
+      <p:sp>
+        <p:nvSpPr>
+          <p:cNvPr id="14" name="TextBox 13"/>
+          <p:cNvSpPr txBox="1"/>
+          <p:nvPr/>
+        </p:nvSpPr>
+        <p:spPr>
+          <a:xfrm>
+            <a:off x="868680" y="3246120"/>
+            <a:ext cx="4846320" cy="1051560"/>
+          </a:xfrm>
+          <a:prstGeom prst="rect">
+            <a:avLst/>
+          </a:prstGeom>
+          <a:noFill/>
+        </p:spPr>
+        <p:txBody>
+          <a:bodyPr wrap="square">
+            <a:spAutoFit/>
+          </a:bodyPr>
+          <a:lstStyle/>
+          <a:p>
+            <a:pPr algn="l">
+              <a:defRPr sz="1050" b="0">
+                <a:solidFill>
+                  <a:srgbClr val="DDDDDD"/>
+                </a:solidFill>
+                <a:latin typeface="Calibri"/>
+              </a:defRPr>
+            </a:pPr>
+            <a:r>
+              <a:t>68 outliers detectados: 23 em Single_epithelial,</a:t>
+            </a:r>
+            <a:br/>
+            <a:r>
+              <a:t>45 em Mitoses. Decisao: MANTER TODOS.</a:t>
+            </a:r>
+            <a:br/>
+            <a:r>
+              <a:t>Contexto medico: nota 10 = severidade, nao erro.</a:t>
+            </a:r>
+          </a:p>
+        </p:txBody>
+      </p:sp>
+      <p:sp>
+        <p:nvSpPr>
+          <p:cNvPr id="15" name="Rectangle 14"/>
+          <p:cNvSpPr/>
+          <p:nvPr/>
+        </p:nvSpPr>
+        <p:spPr>
+          <a:xfrm>
+            <a:off x="6217920" y="2834640"/>
+            <a:ext cx="5120640" cy="1554480"/>
+          </a:xfrm>
+          <a:prstGeom prst="rect">
+            <a:avLst/>
+          </a:prstGeom>
+          <a:solidFill>
+            <a:srgbClr val="152A3A"/>
+          </a:solidFill>
+          <a:ln>
+            <a:noFill/>
+          </a:ln>
+        </p:spPr>
+        <p:style>
+          <a:lnRef idx="1">
+            <a:schemeClr val="accent1"/>
+          </a:lnRef>
+          <a:fillRef idx="3">
+            <a:schemeClr val="accent1"/>
+          </a:fillRef>
+          <a:effectRef idx="2">
+            <a:schemeClr val="accent1"/>
+          </a:effectRef>
+          <a:fontRef idx="minor">
+            <a:schemeClr val="lt1"/>
+          </a:fontRef>
+        </p:style>
+        <p:txBody>
+          <a:bodyPr rtlCol="0" anchor="ctr"/>
+          <a:lstStyle/>
+          <a:p>
+            <a:pPr algn="ctr"/>
+          </a:p>
+        </p:txBody>
+      </p:sp>
+      <p:sp>
+        <p:nvSpPr>
+          <p:cNvPr id="16" name="TextBox 15"/>
+          <p:cNvSpPr txBox="1"/>
+          <p:nvPr/>
+        </p:nvSpPr>
+        <p:spPr>
+          <a:xfrm>
+            <a:off x="6355080" y="2926080"/>
+            <a:ext cx="4846320" cy="274320"/>
+          </a:xfrm>
+          <a:prstGeom prst="rect">
+            <a:avLst/>
+          </a:prstGeom>
+          <a:noFill/>
+        </p:spPr>
+        <p:txBody>
+          <a:bodyPr wrap="square">
+            <a:spAutoFit/>
+          </a:bodyPr>
+          <a:lstStyle/>
+          <a:p>
+            <a:pPr algn="l">
+              <a:defRPr sz="1300" b="1">
+                <a:solidFill>
+                  <a:srgbClr val="FFFFFF"/>
+                </a:solidFill>
+                <a:latin typeface="Calibri"/>
+              </a:defRPr>
+            </a:pPr>
+            <a:r>
+              <a:t>Etapa 8b-d: Inconsistentes / Redundantes / Ausentes</a:t>
+            </a:r>
+          </a:p>
+        </p:txBody>
+      </p:sp>
+      <p:sp>
+        <p:nvSpPr>
+          <p:cNvPr id="17" name="TextBox 16"/>
+          <p:cNvSpPr txBox="1"/>
+          <p:nvPr/>
+        </p:nvSpPr>
+        <p:spPr>
+          <a:xfrm>
+            <a:off x="6355080" y="3246120"/>
+            <a:ext cx="4846320" cy="1051560"/>
+          </a:xfrm>
+          <a:prstGeom prst="rect">
+            <a:avLst/>
+          </a:prstGeom>
+          <a:noFill/>
+        </p:spPr>
+        <p:txBody>
+          <a:bodyPr wrap="square">
+            <a:spAutoFit/>
+          </a:bodyPr>
+          <a:lstStyle/>
+          <a:p>
+            <a:pPr algn="l">
+              <a:defRPr sz="1050" b="0">
+                <a:solidFill>
+                  <a:srgbClr val="DDDDDD"/>
+                </a:solidFill>
+                <a:latin typeface="Calibri"/>
+              </a:defRPr>
+            </a:pPr>
+            <a:r>
+              <a:t>0 inconsistentes (todos em [1,10]).</a:t>
+            </a:r>
+            <a:br/>
+            <a:r>
+              <a:t>0 ausentes no treino (16 linhas filtradas na Etapa 1).</a:t>
+            </a:r>
+            <a:br/>
+            <a:r>
+              <a:t>Imputacao: MODA, nao media — dados discretos (1-10).</a:t>
+            </a:r>
+          </a:p>
+        </p:txBody>
+      </p:sp>
+      <p:sp>
+        <p:nvSpPr>
+          <p:cNvPr id="18" name="Rectangle 17"/>
+          <p:cNvSpPr/>
+          <p:nvPr/>
+        </p:nvSpPr>
+        <p:spPr>
+          <a:xfrm>
+            <a:off x="731520" y="4572000"/>
+            <a:ext cx="5120640" cy="1554480"/>
+          </a:xfrm>
+          <a:prstGeom prst="rect">
+            <a:avLst/>
+          </a:prstGeom>
+          <a:solidFill>
+            <a:srgbClr val="1B7A8A"/>
+          </a:solidFill>
+          <a:ln>
+            <a:noFill/>
+          </a:ln>
+        </p:spPr>
+        <p:style>
+          <a:lnRef idx="1">
+            <a:schemeClr val="accent1"/>
+          </a:lnRef>
+          <a:fillRef idx="3">
+            <a:schemeClr val="accent1"/>
+          </a:fillRef>
+          <a:effectRef idx="2">
+            <a:schemeClr val="accent1"/>
+          </a:effectRef>
+          <a:fontRef idx="minor">
+            <a:schemeClr val="lt1"/>
+          </a:fontRef>
+        </p:style>
+        <p:txBody>
+          <a:bodyPr rtlCol="0" anchor="ctr"/>
+          <a:lstStyle/>
+          <a:p>
+            <a:pPr algn="ctr"/>
+          </a:p>
+        </p:txBody>
+      </p:sp>
+      <p:sp>
+        <p:nvSpPr>
+          <p:cNvPr id="19" name="TextBox 18"/>
+          <p:cNvSpPr txBox="1"/>
+          <p:nvPr/>
+        </p:nvSpPr>
+        <p:spPr>
+          <a:xfrm>
+            <a:off x="868680" y="4663440"/>
+            <a:ext cx="4846320" cy="274320"/>
+          </a:xfrm>
+          <a:prstGeom prst="rect">
+            <a:avLst/>
+          </a:prstGeom>
+          <a:noFill/>
+        </p:spPr>
+        <p:txBody>
+          <a:bodyPr wrap="square">
+            <a:spAutoFit/>
+          </a:bodyPr>
+          <a:lstStyle/>
+          <a:p>
+            <a:pPr algn="l">
+              <a:defRPr sz="1300" b="1">
+                <a:solidFill>
+                  <a:srgbClr val="FFFFFF"/>
+                </a:solidFill>
+                <a:latin typeface="Calibri"/>
+              </a:defRPr>
+            </a:pPr>
+            <a:r>
+              <a:t>Etapa 9: Normalizacao Min-Max [0, 1]</a:t>
+            </a:r>
+          </a:p>
+        </p:txBody>
+      </p:sp>
+      <p:sp>
+        <p:nvSpPr>
+          <p:cNvPr id="20" name="TextBox 19"/>
+          <p:cNvSpPr txBox="1"/>
+          <p:nvPr/>
+        </p:nvSpPr>
+        <p:spPr>
+          <a:xfrm>
+            <a:off x="868680" y="4983480"/>
+            <a:ext cx="4846320" cy="1051560"/>
+          </a:xfrm>
+          <a:prstGeom prst="rect">
+            <a:avLst/>
+          </a:prstGeom>
+          <a:noFill/>
+        </p:spPr>
+        <p:txBody>
+          <a:bodyPr wrap="square">
+            <a:spAutoFit/>
+          </a:bodyPr>
+          <a:lstStyle/>
+          <a:p>
+            <a:pPr algn="l">
+              <a:defRPr sz="1050" b="0">
+                <a:solidFill>
+                  <a:srgbClr val="DDDDDD"/>
+                </a:solidFill>
+                <a:latin typeface="Calibri"/>
+              </a:defRPr>
+            </a:pPr>
+            <a:r>
+              <a:t>Parametros (min, max) do TREINO aplicados ao teste.</a:t>
+            </a:r>
+            <a:br/>
+            <a:r>
+              <a:t>Essencial: K-NN (distancia euclidiana) e MLP (sigmoid).</a:t>
+            </a:r>
+            <a:br/>
+            <a:r>
+              <a:t>Preserva estrutura da distribuicao original (1-10).</a:t>
+            </a:r>
+          </a:p>
+        </p:txBody>
+      </p:sp>
+      <p:sp>
+        <p:nvSpPr>
+          <p:cNvPr id="21" name="Rectangle 20"/>
+          <p:cNvSpPr/>
+          <p:nvPr/>
+        </p:nvSpPr>
+        <p:spPr>
+          <a:xfrm>
+            <a:off x="6217920" y="4572000"/>
+            <a:ext cx="5120640" cy="1554480"/>
+          </a:xfrm>
+          <a:prstGeom prst="rect">
+            <a:avLst/>
+          </a:prstGeom>
+          <a:solidFill>
+            <a:srgbClr val="152A3A"/>
+          </a:solidFill>
+          <a:ln>
+            <a:noFill/>
+          </a:ln>
+        </p:spPr>
+        <p:style>
+          <a:lnRef idx="1">
+            <a:schemeClr val="accent1"/>
+          </a:lnRef>
+          <a:fillRef idx="3">
+            <a:schemeClr val="accent1"/>
+          </a:fillRef>
+          <a:effectRef idx="2">
+            <a:schemeClr val="accent1"/>
+          </a:effectRef>
+          <a:fontRef idx="minor">
+            <a:schemeClr val="lt1"/>
+          </a:fontRef>
+        </p:style>
+        <p:txBody>
+          <a:bodyPr rtlCol="0" anchor="ctr"/>
+          <a:lstStyle/>
+          <a:p>
+            <a:pPr algn="ctr"/>
+          </a:p>
+        </p:txBody>
+      </p:sp>
+      <p:sp>
+        <p:nvSpPr>
+          <p:cNvPr id="22" name="TextBox 21"/>
+          <p:cNvSpPr txBox="1"/>
+          <p:nvPr/>
+        </p:nvSpPr>
+        <p:spPr>
+          <a:xfrm>
+            <a:off x="6355080" y="4663440"/>
+            <a:ext cx="4846320" cy="274320"/>
+          </a:xfrm>
+          <a:prstGeom prst="rect">
+            <a:avLst/>
+          </a:prstGeom>
+          <a:noFill/>
+        </p:spPr>
+        <p:txBody>
+          <a:bodyPr wrap="square">
+            <a:spAutoFit/>
+          </a:bodyPr>
+          <a:lstStyle/>
+          <a:p>
+            <a:pPr algn="l">
+              <a:defRPr sz="1300" b="1">
+                <a:solidFill>
+                  <a:srgbClr val="FFFFFF"/>
+                </a:solidFill>
+                <a:latin typeface="Calibri"/>
+              </a:defRPr>
+            </a:pPr>
+            <a:r>
+              <a:t>Etapa 10: Correlacao de Pearson</a:t>
+            </a:r>
+          </a:p>
+        </p:txBody>
+      </p:sp>
+      <p:sp>
+        <p:nvSpPr>
+          <p:cNvPr id="23" name="TextBox 22"/>
+          <p:cNvSpPr txBox="1"/>
+          <p:nvPr/>
+        </p:nvSpPr>
+        <p:spPr>
+          <a:xfrm>
+            <a:off x="6355080" y="4983480"/>
+            <a:ext cx="4846320" cy="1051560"/>
+          </a:xfrm>
+          <a:prstGeom prst="rect">
+            <a:avLst/>
+          </a:prstGeom>
+          <a:noFill/>
+        </p:spPr>
+        <p:txBody>
+          <a:bodyPr wrap="square">
+            <a:spAutoFit/>
+          </a:bodyPr>
+          <a:lstStyle/>
+          <a:p>
+            <a:pPr algn="l">
+              <a:defRPr sz="1050" b="0">
+                <a:solidFill>
+                  <a:srgbClr val="DDDDDD"/>
+                </a:solidFill>
+                <a:latin typeface="Calibri"/>
+              </a:defRPr>
+            </a:pPr>
+            <a:r>
+              <a:t>Todas com |r| &gt;= 0.10: 9/9 features mantidas.</a:t>
+            </a:r>
+            <a:br/>
+            <a:r>
+              <a:t>Bare_nuclei (r=+0.77), Mitoses (r=+0.36).</a:t>
+            </a:r>
+            <a:br/>
+            <a:r>
+              <a:t>Pearson em vez de PCA: implementavel do zero, interpretavel.</a:t>
+            </a:r>
+          </a:p>
+        </p:txBody>
+      </p:sp>
+    </p:spTree>
+  </p:cSld>
+  <p:clrMapOvr>
+    <a:masterClrMapping/>
+  </p:clrMapOvr>
+</p:sld>
+</file>
+
+<file path=ppt/slides/slide4.xml><?xml version="1.0" encoding="utf-8"?>
+<p:sld xmlns:a="http://schemas.openxmlformats.org/drawingml/2006/main" xmlns:p="http://schemas.openxmlformats.org/presentationml/2006/main" xmlns:r="http://schemas.openxmlformats.org/officeDocument/2006/relationships">
+  <p:cSld>
+    <p:spTree>
+      <p:nvGrpSpPr>
+        <p:cNvPr id="1" name=""/>
+        <p:cNvGrpSpPr/>
+        <p:nvPr/>
+      </p:nvGrpSpPr>
+      <p:grpSpPr/>
+      <p:sp>
+        <p:nvSpPr>
+          <p:cNvPr id="2" name="Rectangle 1"/>
+          <p:cNvSpPr/>
+          <p:nvPr/>
+        </p:nvSpPr>
+        <p:spPr>
+          <a:xfrm>
+            <a:off x="0" y="0"/>
+            <a:ext cx="109728" cy="6858000"/>
+          </a:xfrm>
+          <a:prstGeom prst="rect">
+            <a:avLst/>
+          </a:prstGeom>
+          <a:solidFill>
+            <a:srgbClr val="1B7A8A"/>
+          </a:solidFill>
+          <a:ln>
+            <a:noFill/>
+          </a:ln>
+        </p:spPr>
+        <p:style>
+          <a:lnRef idx="1">
+            <a:schemeClr val="accent1"/>
+          </a:lnRef>
+          <a:fillRef idx="3">
+            <a:schemeClr val="accent1"/>
+          </a:fillRef>
+          <a:effectRef idx="2">
+            <a:schemeClr val="accent1"/>
+          </a:effectRef>
+          <a:fontRef idx="minor">
+            <a:schemeClr val="lt1"/>
+          </a:fontRef>
+        </p:style>
+        <p:txBody>
+          <a:bodyPr rtlCol="0" anchor="ctr"/>
+          <a:lstStyle/>
+          <a:p>
+            <a:pPr algn="ctr"/>
+          </a:p>
+        </p:txBody>
+      </p:sp>
+      <p:sp>
+        <p:nvSpPr>
+          <p:cNvPr id="3" name="TextBox 2"/>
+          <p:cNvSpPr txBox="1"/>
+          <p:nvPr/>
+        </p:nvSpPr>
+        <p:spPr>
+          <a:xfrm>
+            <a:off x="731520" y="320040"/>
+            <a:ext cx="10607040" cy="548640"/>
+          </a:xfrm>
+          <a:prstGeom prst="rect">
+            <a:avLst/>
+          </a:prstGeom>
+          <a:noFill/>
+        </p:spPr>
+        <p:txBody>
+          <a:bodyPr wrap="square">
+            <a:spAutoFit/>
+          </a:bodyPr>
+          <a:lstStyle/>
+          <a:p>
+            <a:pPr algn="l">
+              <a:defRPr sz="3000" b="1">
+                <a:solidFill>
+                  <a:srgbClr val="1B7A8A"/>
+                </a:solidFill>
+                <a:latin typeface="Calibri Light"/>
+              </a:defRPr>
+            </a:pPr>
+            <a:r>
+              <a:t>Notebook 3: Modelagem Preditiva</a:t>
+            </a:r>
+          </a:p>
+        </p:txBody>
+      </p:sp>
+      <p:sp>
+        <p:nvSpPr>
+          <p:cNvPr id="4" name="Rectangle 3"/>
+          <p:cNvSpPr/>
+          <p:nvPr/>
+        </p:nvSpPr>
+        <p:spPr>
+          <a:xfrm>
+            <a:off x="731520" y="6236208"/>
+            <a:ext cx="10607040" cy="27432"/>
+          </a:xfrm>
+          <a:prstGeom prst="rect">
+            <a:avLst/>
+          </a:prstGeom>
+          <a:solidFill>
+            <a:srgbClr val="1B7A8A"/>
+          </a:solidFill>
+          <a:ln>
+            <a:noFill/>
+          </a:ln>
+        </p:spPr>
+        <p:style>
+          <a:lnRef idx="1">
+            <a:schemeClr val="accent1"/>
+          </a:lnRef>
+          <a:fillRef idx="3">
+            <a:schemeClr val="accent1"/>
+          </a:fillRef>
+          <a:effectRef idx="2">
+            <a:schemeClr val="accent1"/>
+          </a:effectRef>
+          <a:fontRef idx="minor">
+            <a:schemeClr val="lt1"/>
+          </a:fontRef>
+        </p:style>
+        <p:txBody>
+          <a:bodyPr rtlCol="0" anchor="ctr"/>
+          <a:lstStyle/>
+          <a:p>
+            <a:pPr algn="ctr"/>
+          </a:p>
+        </p:txBody>
+      </p:sp>
+      <p:sp>
+        <p:nvSpPr>
+          <p:cNvPr id="5" name="TextBox 4"/>
+          <p:cNvSpPr txBox="1"/>
+          <p:nvPr/>
+        </p:nvSpPr>
+        <p:spPr>
+          <a:xfrm>
+            <a:off x="731520" y="6309360"/>
+            <a:ext cx="10607040" cy="365760"/>
+          </a:xfrm>
+          <a:prstGeom prst="rect">
+            <a:avLst/>
+          </a:prstGeom>
+          <a:noFill/>
+        </p:spPr>
+        <p:txBody>
+          <a:bodyPr wrap="square">
+            <a:spAutoFit/>
+          </a:bodyPr>
+          <a:lstStyle/>
+          <a:p>
+            <a:pPr algn="l">
+              <a:defRPr sz="900" b="0">
+                <a:solidFill>
+                  <a:srgbClr val="999999"/>
+                </a:solidFill>
+                <a:latin typeface="Calibri"/>
+              </a:defRPr>
+            </a:pPr>
+            <a:r>
+              <a:t>Etapas 2.1 a 2.7  |  137 exemplos de teste  |  Classe positiva = 1 (Maligno)  |  Metrica principal: F1-Score</a:t>
+            </a:r>
+          </a:p>
+        </p:txBody>
+      </p:sp>
+      <p:sp>
+        <p:nvSpPr>
+          <p:cNvPr id="6" name="TextBox 5"/>
+          <p:cNvSpPr txBox="1"/>
+          <p:nvPr/>
+        </p:nvSpPr>
+        <p:spPr>
+          <a:xfrm>
+            <a:off x="731520" y="1051560"/>
+            <a:ext cx="5303520" cy="274320"/>
+          </a:xfrm>
+          <a:prstGeom prst="rect">
+            <a:avLst/>
+          </a:prstGeom>
+          <a:noFill/>
+        </p:spPr>
+        <p:txBody>
+          <a:bodyPr wrap="square">
+            <a:spAutoFit/>
+          </a:bodyPr>
+          <a:lstStyle/>
+          <a:p>
+            <a:pPr algn="l">
+              <a:defRPr sz="1400" b="1">
+                <a:solidFill>
+                  <a:srgbClr val="1B7A8A"/>
+                </a:solidFill>
+                <a:latin typeface="Calibri"/>
+              </a:defRPr>
+            </a:pPr>
+            <a:r>
+              <a:t>Etapa 2.1: Validacao</a:t>
+            </a:r>
+          </a:p>
+        </p:txBody>
+      </p:sp>
+      <p:sp>
+        <p:nvSpPr>
+          <p:cNvPr id="7" name="TextBox 6"/>
+          <p:cNvSpPr txBox="1"/>
+          <p:nvPr/>
+        </p:nvSpPr>
+        <p:spPr>
+          <a:xfrm>
+            <a:off x="731520" y="1325880"/>
+            <a:ext cx="5303520" cy="320040"/>
+          </a:xfrm>
+          <a:prstGeom prst="rect">
+            <a:avLst/>
+          </a:prstGeom>
+          <a:noFill/>
+        </p:spPr>
+        <p:txBody>
+          <a:bodyPr wrap="square">
+            <a:spAutoFit/>
+          </a:bodyPr>
+          <a:lstStyle/>
+          <a:p>
+            <a:pPr algn="l">
+              <a:defRPr sz="1050" b="0">
+                <a:solidFill>
+                  <a:srgbClr val="222222"/>
+                </a:solidFill>
+                <a:latin typeface="Calibri"/>
+              </a:defRPr>
+            </a:pPr>
+            <a:r>
+              <a:t>Hold-out 80/20 estratificado (seed=42) — mesmo split da Etapa 5.</a:t>
+            </a:r>
+          </a:p>
+        </p:txBody>
+      </p:sp>
+      <p:sp>
+        <p:nvSpPr>
+          <p:cNvPr id="8" name="TextBox 7"/>
+          <p:cNvSpPr txBox="1"/>
+          <p:nvPr/>
+        </p:nvSpPr>
+        <p:spPr>
+          <a:xfrm>
+            <a:off x="731520" y="1691640"/>
+            <a:ext cx="5303520" cy="274320"/>
+          </a:xfrm>
+          <a:prstGeom prst="rect">
+            <a:avLst/>
+          </a:prstGeom>
+          <a:noFill/>
+        </p:spPr>
+        <p:txBody>
+          <a:bodyPr wrap="square">
+            <a:spAutoFit/>
+          </a:bodyPr>
+          <a:lstStyle/>
+          <a:p>
+            <a:pPr algn="l">
+              <a:defRPr sz="1400" b="1">
+                <a:solidFill>
+                  <a:srgbClr val="1B7A8A"/>
+                </a:solidFill>
+                <a:latin typeface="Calibri"/>
+              </a:defRPr>
+            </a:pPr>
+            <a:r>
+              <a:t>Etapa 2.2: Metricas (6, todas do zero)</a:t>
+            </a:r>
+          </a:p>
+        </p:txBody>
+      </p:sp>
+      <p:sp>
+        <p:nvSpPr>
+          <p:cNvPr id="9" name="TextBox 8"/>
+          <p:cNvSpPr txBox="1"/>
+          <p:nvPr/>
+        </p:nvSpPr>
+        <p:spPr>
+          <a:xfrm>
+            <a:off x="731520" y="1965960"/>
+            <a:ext cx="5303520" cy="640080"/>
+          </a:xfrm>
+          <a:prstGeom prst="rect">
+            <a:avLst/>
+          </a:prstGeom>
+          <a:noFill/>
+        </p:spPr>
+        <p:txBody>
+          <a:bodyPr wrap="square">
+            <a:spAutoFit/>
+          </a:bodyPr>
+          <a:lstStyle/>
+          <a:p>
+            <a:pPr algn="l">
+              <a:defRPr sz="1050" b="0">
+                <a:solidFill>
+                  <a:srgbClr val="222222"/>
+                </a:solidFill>
+                <a:latin typeface="Calibri"/>
+              </a:defRPr>
+            </a:pPr>
+            <a:r>
+              <a:t>Matriz de Confusao (TP,TN,FP,FN)  |  Acuracia  |  Precisao</a:t>
+            </a:r>
+            <a:br/>
+            <a:r>
+              <a:t>Recall (Sensibilidade) — MAIS CRITICA: falso negativo = cancer nao detectado</a:t>
+            </a:r>
+            <a:br/>
+            <a:r>
+              <a:t>Especificidade  |  F1-Score — media harmonica P e R, criterio de desempate</a:t>
+            </a:r>
+          </a:p>
+        </p:txBody>
+      </p:sp>
+      <p:sp>
+        <p:nvSpPr>
+          <p:cNvPr id="10" name="TextBox 9"/>
+          <p:cNvSpPr txBox="1"/>
+          <p:nvPr/>
+        </p:nvSpPr>
+        <p:spPr>
+          <a:xfrm>
+            <a:off x="731520" y="2697480"/>
+            <a:ext cx="5303520" cy="274320"/>
+          </a:xfrm>
+          <a:prstGeom prst="rect">
+            <a:avLst/>
+          </a:prstGeom>
+          <a:noFill/>
+        </p:spPr>
+        <p:txBody>
+          <a:bodyPr wrap="square">
+            <a:spAutoFit/>
+          </a:bodyPr>
+          <a:lstStyle/>
+          <a:p>
+            <a:pPr algn="l">
+              <a:defRPr sz="1400" b="1">
+                <a:solidFill>
+                  <a:srgbClr val="1B7A8A"/>
+                </a:solidFill>
+                <a:latin typeface="Calibri"/>
+              </a:defRPr>
+            </a:pPr>
+            <a:r>
+              <a:t>Etapa 2.3: Baseline (Classe Majoritaria)</a:t>
+            </a:r>
+          </a:p>
+        </p:txBody>
+      </p:sp>
+      <p:sp>
+        <p:nvSpPr>
+          <p:cNvPr id="11" name="Rectangle 10"/>
+          <p:cNvSpPr/>
+          <p:nvPr/>
+        </p:nvSpPr>
+        <p:spPr>
+          <a:xfrm>
+            <a:off x="731520" y="2971800"/>
+            <a:ext cx="5303520" cy="594360"/>
+          </a:xfrm>
+          <a:prstGeom prst="rect">
+            <a:avLst/>
+          </a:prstGeom>
+          <a:solidFill>
+            <a:srgbClr val="1B7A8A"/>
+          </a:solidFill>
+          <a:ln>
+            <a:noFill/>
+          </a:ln>
+        </p:spPr>
+        <p:style>
+          <a:lnRef idx="1">
+            <a:schemeClr val="accent1"/>
+          </a:lnRef>
+          <a:fillRef idx="3">
+            <a:schemeClr val="accent1"/>
+          </a:fillRef>
+          <a:effectRef idx="2">
+            <a:schemeClr val="accent1"/>
+          </a:effectRef>
+          <a:fontRef idx="minor">
+            <a:schemeClr val="lt1"/>
+          </a:fontRef>
+        </p:style>
+        <p:txBody>
+          <a:bodyPr rtlCol="0" anchor="ctr"/>
+          <a:lstStyle/>
+          <a:p>
+            <a:pPr algn="ctr"/>
+          </a:p>
+        </p:txBody>
+      </p:sp>
+      <p:sp>
+        <p:nvSpPr>
+          <p:cNvPr id="12" name="TextBox 11"/>
+          <p:cNvSpPr txBox="1"/>
+          <p:nvPr/>
+        </p:nvSpPr>
+        <p:spPr>
+          <a:xfrm>
+            <a:off x="868680" y="2999232"/>
+            <a:ext cx="5029200" cy="530352"/>
+          </a:xfrm>
+          <a:prstGeom prst="rect">
+            <a:avLst/>
+          </a:prstGeom>
+          <a:noFill/>
+        </p:spPr>
+        <p:txBody>
+          <a:bodyPr wrap="square">
+            <a:spAutoFit/>
+          </a:bodyPr>
+          <a:lstStyle/>
+          <a:p>
+            <a:pPr algn="l">
+              <a:defRPr sz="1050" b="0">
+                <a:solidFill>
+                  <a:srgbClr val="FFFFFF"/>
+                </a:solidFill>
+                <a:latin typeface="Calibri"/>
+              </a:defRPr>
+            </a:pPr>
+            <a:r>
+              <a:t>Sempre prediz Maligno (52.2% no treino). Piso minimo: F1 = 0.5189</a:t>
+            </a:r>
+            <a:br/>
+            <a:r>
+              <a:t>Matriz: TN=0  FP=89  FN=0  TP=48  |  Recall=100% mas precisao=35% — inutil na pratica</a:t>
+            </a:r>
+          </a:p>
+        </p:txBody>
+      </p:sp>
+      <p:sp>
+        <p:nvSpPr>
+          <p:cNvPr id="13" name="TextBox 12"/>
+          <p:cNvSpPr txBox="1"/>
+          <p:nvPr/>
+        </p:nvSpPr>
+        <p:spPr>
+          <a:xfrm>
+            <a:off x="6400800" y="1051560"/>
+            <a:ext cx="5029200" cy="274320"/>
+          </a:xfrm>
+          <a:prstGeom prst="rect">
+            <a:avLst/>
+          </a:prstGeom>
+          <a:noFill/>
+        </p:spPr>
+        <p:txBody>
+          <a:bodyPr wrap="square">
+            <a:spAutoFit/>
+          </a:bodyPr>
+          <a:lstStyle/>
+          <a:p>
+            <a:pPr algn="l">
+              <a:defRPr sz="1400" b="1">
+                <a:solidFill>
+                  <a:srgbClr val="1B7A8A"/>
+                </a:solidFill>
+                <a:latin typeface="Calibri"/>
+              </a:defRPr>
+            </a:pPr>
+            <a:r>
+              <a:t>Algoritmos Implementados do Zero</a:t>
+            </a:r>
+          </a:p>
+        </p:txBody>
+      </p:sp>
+      <p:sp>
+        <p:nvSpPr>
+          <p:cNvPr id="14" name="Rectangle 13"/>
+          <p:cNvSpPr/>
+          <p:nvPr/>
+        </p:nvSpPr>
+        <p:spPr>
+          <a:xfrm>
+            <a:off x="6400800" y="1371600"/>
+            <a:ext cx="5029200" cy="274320"/>
+          </a:xfrm>
+          <a:prstGeom prst="rect">
+            <a:avLst/>
+          </a:prstGeom>
+          <a:solidFill>
+            <a:srgbClr val="1B7A8A"/>
+          </a:solidFill>
+          <a:ln>
+            <a:noFill/>
+          </a:ln>
+        </p:spPr>
+        <p:style>
+          <a:lnRef idx="1">
+            <a:schemeClr val="accent1"/>
+          </a:lnRef>
+          <a:fillRef idx="3">
+            <a:schemeClr val="accent1"/>
+          </a:fillRef>
+          <a:effectRef idx="2">
+            <a:schemeClr val="accent1"/>
+          </a:effectRef>
+          <a:fontRef idx="minor">
+            <a:schemeClr val="lt1"/>
+          </a:fontRef>
+        </p:style>
+        <p:txBody>
+          <a:bodyPr rtlCol="0" anchor="ctr"/>
+          <a:lstStyle/>
+          <a:p>
+            <a:pPr algn="ctr"/>
+          </a:p>
+        </p:txBody>
+      </p:sp>
+      <p:sp>
+        <p:nvSpPr>
+          <p:cNvPr id="15" name="TextBox 14"/>
+          <p:cNvSpPr txBox="1"/>
+          <p:nvPr/>
+        </p:nvSpPr>
+        <p:spPr>
+          <a:xfrm>
+            <a:off x="6537960" y="1389888"/>
+            <a:ext cx="4754880" cy="237744"/>
+          </a:xfrm>
+          <a:prstGeom prst="rect">
+            <a:avLst/>
+          </a:prstGeom>
+          <a:noFill/>
+        </p:spPr>
+        <p:txBody>
+          <a:bodyPr wrap="square">
+            <a:spAutoFit/>
+          </a:bodyPr>
+          <a:lstStyle/>
+          <a:p>
+            <a:pPr algn="l">
+              <a:defRPr sz="1200" b="1">
+                <a:solidFill>
+                  <a:srgbClr val="FFFFFF"/>
+                </a:solidFill>
+                <a:latin typeface="Calibri"/>
+              </a:defRPr>
+            </a:pPr>
+            <a:r>
+              <a:t>Etapa 2.4: K-NN</a:t>
+            </a:r>
+          </a:p>
+        </p:txBody>
+      </p:sp>
+      <p:sp>
+        <p:nvSpPr>
+          <p:cNvPr id="16" name="TextBox 15"/>
+          <p:cNvSpPr txBox="1"/>
+          <p:nvPr/>
+        </p:nvSpPr>
+        <p:spPr>
+          <a:xfrm>
+            <a:off x="6400800" y="1691640"/>
+            <a:ext cx="5029200" cy="1417320"/>
+          </a:xfrm>
+          <a:prstGeom prst="rect">
+            <a:avLst/>
+          </a:prstGeom>
+          <a:noFill/>
+        </p:spPr>
+        <p:txBody>
+          <a:bodyPr wrap="square">
+            <a:spAutoFit/>
+          </a:bodyPr>
+          <a:lstStyle/>
+          <a:p>
+            <a:pPr algn="l">
+              <a:defRPr sz="1050" b="0">
+                <a:solidFill>
+                  <a:srgbClr val="222222"/>
+                </a:solidFill>
+                <a:latin typeface="Calibri"/>
+              </a:defRPr>
+            </a:pPr>
+            <a:r>
+              <a:t>Distancia euclidiana + votacao majoritaria. Testado K in {1,3,5,7,9,11,15}.</a:t>
+            </a:r>
+            <a:br/>
+            <a:r>
+              <a:t>Melhor: K=3 (impar, evita empate). F1=0.9677, Precisao=100%, Recall=93.75%.</a:t>
+            </a:r>
+            <a:br/>
+            <a:r>
+              <a:t>Matriz: TN=89  FP=0  FN=3  TP=45. Zero falsos positivos!</a:t>
+            </a:r>
+          </a:p>
+        </p:txBody>
+      </p:sp>
+      <p:sp>
+        <p:nvSpPr>
+          <p:cNvPr id="17" name="Rectangle 16"/>
+          <p:cNvSpPr/>
+          <p:nvPr/>
+        </p:nvSpPr>
+        <p:spPr>
+          <a:xfrm>
+            <a:off x="6400800" y="3200400"/>
+            <a:ext cx="5029200" cy="274320"/>
+          </a:xfrm>
+          <a:prstGeom prst="rect">
+            <a:avLst/>
+          </a:prstGeom>
+          <a:solidFill>
+            <a:srgbClr val="152A3A"/>
+          </a:solidFill>
+          <a:ln>
+            <a:noFill/>
+          </a:ln>
+        </p:spPr>
+        <p:style>
+          <a:lnRef idx="1">
+            <a:schemeClr val="accent1"/>
+          </a:lnRef>
+          <a:fillRef idx="3">
+            <a:schemeClr val="accent1"/>
+          </a:fillRef>
+          <a:effectRef idx="2">
+            <a:schemeClr val="accent1"/>
+          </a:effectRef>
+          <a:fontRef idx="minor">
+            <a:schemeClr val="lt1"/>
+          </a:fontRef>
+        </p:style>
+        <p:txBody>
+          <a:bodyPr rtlCol="0" anchor="ctr"/>
+          <a:lstStyle/>
+          <a:p>
+            <a:pPr algn="ctr"/>
+          </a:p>
+        </p:txBody>
+      </p:sp>
+      <p:sp>
+        <p:nvSpPr>
+          <p:cNvPr id="18" name="TextBox 17"/>
+          <p:cNvSpPr txBox="1"/>
+          <p:nvPr/>
+        </p:nvSpPr>
+        <p:spPr>
+          <a:xfrm>
+            <a:off x="6537960" y="3218688"/>
+            <a:ext cx="4754880" cy="237744"/>
+          </a:xfrm>
+          <a:prstGeom prst="rect">
+            <a:avLst/>
+          </a:prstGeom>
+          <a:noFill/>
+        </p:spPr>
+        <p:txBody>
+          <a:bodyPr wrap="square">
+            <a:spAutoFit/>
+          </a:bodyPr>
+          <a:lstStyle/>
+          <a:p>
+            <a:pPr algn="l">
+              <a:defRPr sz="1200" b="1">
+                <a:solidFill>
+                  <a:srgbClr val="FFFFFF"/>
+                </a:solidFill>
+                <a:latin typeface="Calibri"/>
+              </a:defRPr>
+            </a:pPr>
+            <a:r>
+              <a:t>Etapa 2.5: Arvore C4.5</a:t>
+            </a:r>
+          </a:p>
+        </p:txBody>
+      </p:sp>
+      <p:sp>
+        <p:nvSpPr>
+          <p:cNvPr id="19" name="TextBox 18"/>
+          <p:cNvSpPr txBox="1"/>
+          <p:nvPr/>
+        </p:nvSpPr>
+        <p:spPr>
+          <a:xfrm>
+            <a:off x="6400800" y="3520440"/>
+            <a:ext cx="5029200" cy="1417320"/>
+          </a:xfrm>
+          <a:prstGeom prst="rect">
+            <a:avLst/>
+          </a:prstGeom>
+          <a:noFill/>
+        </p:spPr>
+        <p:txBody>
+          <a:bodyPr wrap="square">
+            <a:spAutoFit/>
+          </a:bodyPr>
+          <a:lstStyle/>
+          <a:p>
+            <a:pPr algn="l">
+              <a:defRPr sz="1050" b="0">
+                <a:solidFill>
+                  <a:srgbClr val="222222"/>
+                </a:solidFill>
+                <a:latin typeface="Calibri"/>
+              </a:defRPr>
+            </a:pPr>
+            <a:r>
+              <a:t>Gain Ratio (IG/SplitInfo) — corrige vies do IG puro. Poda por profundidade.</a:t>
+            </a:r>
+            <a:br/>
+            <a:r>
+              <a:t>Melhor: d=3, 15 nos. F1=0.9574, Precisao=97.83%, Recall=93.75%.</a:t>
+            </a:r>
+            <a:br/>
+            <a:r>
+              <a:t>Raiz: Uniformity_of_cell_size &lt;= 0.2778. Totalmente interpretavel.</a:t>
+            </a:r>
+          </a:p>
+        </p:txBody>
+      </p:sp>
+      <p:sp>
+        <p:nvSpPr>
+          <p:cNvPr id="20" name="Rectangle 19"/>
+          <p:cNvSpPr/>
+          <p:nvPr/>
+        </p:nvSpPr>
+        <p:spPr>
+          <a:xfrm>
+            <a:off x="6400800" y="5029200"/>
+            <a:ext cx="5029200" cy="274320"/>
+          </a:xfrm>
+          <a:prstGeom prst="rect">
+            <a:avLst/>
+          </a:prstGeom>
+          <a:solidFill>
+            <a:srgbClr val="1B7A8A"/>
+          </a:solidFill>
+          <a:ln>
+            <a:noFill/>
+          </a:ln>
+        </p:spPr>
+        <p:style>
+          <a:lnRef idx="1">
+            <a:schemeClr val="accent1"/>
+          </a:lnRef>
+          <a:fillRef idx="3">
+            <a:schemeClr val="accent1"/>
+          </a:fillRef>
+          <a:effectRef idx="2">
+            <a:schemeClr val="accent1"/>
+          </a:effectRef>
+          <a:fontRef idx="minor">
+            <a:schemeClr val="lt1"/>
+          </a:fontRef>
+        </p:style>
+        <p:txBody>
+          <a:bodyPr rtlCol="0" anchor="ctr"/>
+          <a:lstStyle/>
+          <a:p>
+            <a:pPr algn="ctr"/>
+          </a:p>
+        </p:txBody>
+      </p:sp>
+      <p:sp>
+        <p:nvSpPr>
+          <p:cNvPr id="21" name="TextBox 20"/>
+          <p:cNvSpPr txBox="1"/>
+          <p:nvPr/>
+        </p:nvSpPr>
+        <p:spPr>
+          <a:xfrm>
+            <a:off x="6537960" y="5047488"/>
+            <a:ext cx="4754880" cy="237744"/>
+          </a:xfrm>
+          <a:prstGeom prst="rect">
+            <a:avLst/>
+          </a:prstGeom>
+          <a:noFill/>
+        </p:spPr>
+        <p:txBody>
+          <a:bodyPr wrap="square">
+            <a:spAutoFit/>
+          </a:bodyPr>
+          <a:lstStyle/>
+          <a:p>
+            <a:pPr algn="l">
+              <a:defRPr sz="1200" b="1">
+                <a:solidFill>
+                  <a:srgbClr val="FFFFFF"/>
+                </a:solidFill>
+                <a:latin typeface="Calibri"/>
+              </a:defRPr>
+            </a:pPr>
+            <a:r>
+              <a:t>Etapa 2.6: MLP (Rede Neural)</a:t>
+            </a:r>
+          </a:p>
+        </p:txBody>
+      </p:sp>
+      <p:sp>
+        <p:nvSpPr>
+          <p:cNvPr id="22" name="TextBox 21"/>
+          <p:cNvSpPr txBox="1"/>
+          <p:nvPr/>
+        </p:nvSpPr>
+        <p:spPr>
+          <a:xfrm>
+            <a:off x="6400800" y="5349240"/>
+            <a:ext cx="5029200" cy="1417320"/>
+          </a:xfrm>
+          <a:prstGeom prst="rect">
+            <a:avLst/>
+          </a:prstGeom>
+          <a:noFill/>
+        </p:spPr>
+        <p:txBody>
+          <a:bodyPr wrap="square">
+            <a:spAutoFit/>
+          </a:bodyPr>
+          <a:lstStyle/>
+          <a:p>
+            <a:pPr algn="l">
+              <a:defRPr sz="1050" b="0">
+                <a:solidFill>
+                  <a:srgbClr val="222222"/>
+                </a:solidFill>
+                <a:latin typeface="Calibri"/>
+              </a:defRPr>
+            </a:pPr>
+            <a:r>
+              <a:t>Arquitetura 9-&gt;8-&gt;1, sigmoide, backpropagation + SGD manuais.</a:t>
+            </a:r>
+            <a:br/>
+            <a:r>
+              <a:t>500 epocas, lr=0.1, Xavier init. F1=0.9462, Precisao=97.78%, Recall=91.67%.</a:t>
+            </a:r>
+            <a:br/>
+            <a:r>
+              <a:t>Unica config. testada (limitacao de tempo) — F1 e lower bound.</a:t>
             </a:r>
           </a:p>
         </p:txBody>
